--- a/docs/pitch-deck-v3.pptx
+++ b/docs/pitch-deck-v3.pptx
@@ -16,7 +16,7 @@
     <p:sldId id="264" r:id="rId16"/>
     <p:sldId id="265" r:id="rId17"/>
   </p:sldIdLst>
-  <p:sldSz cx="9144000" cy="6858000" type="screen4x3"/>
+  <p:sldSz cx="12191695" cy="6858000" type="screen4x3"/>
   <p:notesSz cx="6858000" cy="9144000"/>
   <p:defaultTextStyle>
     <a:defPPr>
@@ -861,7 +861,7 @@
           <a:lstStyle/>
           <a:p>
             <a:r>
-              <a:t>Under the hood there are four pieces. The escrow contract is Rust on soroban-sdk 26 - seven functions, three events, twenty-eight tests. The web app is Next.js with Prisma and Postgres; its job is to build and submit transactions, never to sign them. Signing is Freighter, client-side. And a standalone subscriber polls the chain for contract events, reconciles them into Postgres, and pushes them to the UI through Redis - that's the live feed you just saw. The throughline for everything I'm about to cover next: the server is stateless about keys, and we build on top of existing Stellar rails wherever we can instead of reinventing them.</a:t>
+              <a:t>Under the hood there are four pieces. The escrow contract is Rust on soroban-sdk 26 - seven functions, three events, twenty-eight tests. The web app is Next.js with Prisma and Postgres; its job is to build and submit transactions, never to sign them. Signing is Freighter, client-side. And a standalone subscriber polls the chain for contract events, reconciles them into Postgres, and pushes them to the UI through Redis - that's the live feed you just saw. The throughline for everything I'm about to cover next: the server is stateless about keys, and we build on top of existing Stellar rails wherever we can.</a:t>
             </a:r>
           </a:p>
         </p:txBody>
@@ -1001,7 +1001,7 @@
           <a:lstStyle/>
           <a:p>
             <a:r>
-              <a:t>We're not planning to reinvent Stellar's rails - we're planning to plug into them. SEP-24 and SEP-31 give us fiat on-ramp and cross-border payout without building our own banking integration. Stellar's passkey smart-wallet work - live since Protocol 21 - lets a player join with just a device fingerprint, no browser extension, which is our biggest onboarding unlock for non-crypto-native players. SEP-50 lets us mint real on-chain trophy and participation NFTs per tournament. Soroswap and the Reflector oracle let a player fund a tournament with whatever asset they already hold, and let us price entry fees in stable USD terms. And MoneyGram's ramp network - cash-to-crypto in over a hundred seventy countries, plus their new MGUSD stablecoin - is how we reach players who don't have a crypto wallet at all. All of this is detailed with sources in our ecosystem research issue on GitHub.</a:t>
+              <a:t>We're not planning to reinvent Stellar's rails - we're planning to plug into them. SEP-24 and SEP-31 give us fiat on-ramp and cross-border payout without building our own banking integration. Stellar's passkey smart-wallet work - live since Protocol 21 - lets a player join with just a device fingerprint, no browser extension, which is our biggest onboarding unlock for non-crypto-native players. SEP-50 lets us mint real on-chain trophy and participation NFTs per tournament. Soroswap and the Reflector oracle let a player fund a tournament with whatever asset they already hold, and let us price entry fees in stable USD terms. And MoneyGram's ramp network - cash-to-crypto in over a hundred seventy countries, plus their new MGUSD stablecoin - is how we reach players who don't have a crypto wallet at all. All of this is detailed with sources in our ecosystem research issue on GitHub (#159).</a:t>
             </a:r>
           </a:p>
         </p:txBody>
@@ -4140,6 +4140,14 @@
 <file path=ppt/slides/slide1.xml><?xml version="1.0" encoding="utf-8"?>
 <p:sld xmlns:a="http://schemas.openxmlformats.org/drawingml/2006/main" xmlns:p="http://schemas.openxmlformats.org/presentationml/2006/main" xmlns:r="http://schemas.openxmlformats.org/officeDocument/2006/relationships">
   <p:cSld>
+    <p:bg>
+      <p:bgPr>
+        <a:solidFill>
+          <a:srgbClr val="131313"/>
+        </a:solidFill>
+        <a:effectLst/>
+      </p:bgPr>
+    </p:bg>
     <p:spTree>
       <p:nvGrpSpPr>
         <p:cNvPr id="1" name=""/>
@@ -4149,14 +4157,104 @@
       <p:grpSpPr/>
       <p:sp>
         <p:nvSpPr>
-          <p:cNvPr id="2" name="TextBox 1"/>
+          <p:cNvPr id="2" name="Rectangle 1"/>
+          <p:cNvSpPr/>
+          <p:nvPr/>
+        </p:nvSpPr>
+        <p:spPr>
+          <a:xfrm>
+            <a:off x="502920" y="457200"/>
+            <a:ext cx="11183112" cy="5577840"/>
+          </a:xfrm>
+          <a:prstGeom prst="rect">
+            <a:avLst/>
+          </a:prstGeom>
+          <a:solidFill>
+            <a:srgbClr val="0E0E0E"/>
+          </a:solidFill>
+          <a:ln w="15875">
+            <a:solidFill>
+              <a:srgbClr val="353534"/>
+            </a:solidFill>
+          </a:ln>
+          <a:effectLst/>
+        </p:spPr>
+        <p:style>
+          <a:lnRef idx="1">
+            <a:schemeClr val="accent1"/>
+          </a:lnRef>
+          <a:fillRef idx="3">
+            <a:schemeClr val="accent1"/>
+          </a:fillRef>
+          <a:effectRef idx="2">
+            <a:schemeClr val="accent1"/>
+          </a:effectRef>
+          <a:fontRef idx="minor">
+            <a:schemeClr val="lt1"/>
+          </a:fontRef>
+        </p:style>
+        <p:txBody>
+          <a:bodyPr rtlCol="0" anchor="ctr"/>
+          <a:lstStyle/>
+          <a:p>
+            <a:pPr algn="ctr"/>
+          </a:p>
+        </p:txBody>
+      </p:sp>
+      <p:sp>
+        <p:nvSpPr>
+          <p:cNvPr id="3" name="Rectangle 2"/>
+          <p:cNvSpPr/>
+          <p:nvPr/>
+        </p:nvSpPr>
+        <p:spPr>
+          <a:xfrm>
+            <a:off x="502920" y="457200"/>
+            <a:ext cx="2011680" cy="50800"/>
+          </a:xfrm>
+          <a:prstGeom prst="rect">
+            <a:avLst/>
+          </a:prstGeom>
+          <a:solidFill>
+            <a:srgbClr val="F7BD48"/>
+          </a:solidFill>
+          <a:ln>
+            <a:noFill/>
+          </a:ln>
+          <a:effectLst/>
+        </p:spPr>
+        <p:style>
+          <a:lnRef idx="1">
+            <a:schemeClr val="accent1"/>
+          </a:lnRef>
+          <a:fillRef idx="3">
+            <a:schemeClr val="accent1"/>
+          </a:fillRef>
+          <a:effectRef idx="2">
+            <a:schemeClr val="accent1"/>
+          </a:effectRef>
+          <a:fontRef idx="minor">
+            <a:schemeClr val="lt1"/>
+          </a:fontRef>
+        </p:style>
+        <p:txBody>
+          <a:bodyPr rtlCol="0" anchor="ctr"/>
+          <a:lstStyle/>
+          <a:p>
+            <a:pPr algn="ctr"/>
+          </a:p>
+        </p:txBody>
+      </p:sp>
+      <p:sp>
+        <p:nvSpPr>
+          <p:cNvPr id="4" name="TextBox 3"/>
           <p:cNvSpPr txBox="1"/>
           <p:nvPr/>
         </p:nvSpPr>
         <p:spPr>
           <a:xfrm>
-            <a:off x="0" y="0"/>
-            <a:ext cx="9144000" cy="6858000"/>
+            <a:off x="502920" y="2926080"/>
+            <a:ext cx="11183112" cy="548640"/>
           </a:xfrm>
           <a:prstGeom prst="rect">
             <a:avLst/>
@@ -4164,15 +4262,26 @@
           <a:noFill/>
         </p:spPr>
         <p:txBody>
-          <a:bodyPr wrap="square">
+          <a:bodyPr wrap="square" anchor="t">
             <a:spAutoFit/>
           </a:bodyPr>
           <a:lstStyle/>
           <a:p>
-            <a:pPr>
-              <a:defRPr sz="2000"/>
+            <a:pPr algn="ctr">
+              <a:spcBef>
+                <a:spcPts val="0"/>
+              </a:spcBef>
+              <a:spcAft>
+                <a:spcPts val="600"/>
+              </a:spcAft>
             </a:pPr>
             <a:r>
+              <a:rPr sz="1300" b="0" i="0">
+                <a:solidFill>
+                  <a:srgbClr val="D3C4AF"/>
+                </a:solidFill>
+                <a:latin typeface="JetBrains Mono"/>
+              </a:rPr>
               <a:t>[FULL-SLIDE IMAGE - see image prompt #1]</a:t>
             </a:r>
           </a:p>
@@ -4180,14 +4289,14 @@
       </p:sp>
       <p:sp>
         <p:nvSpPr>
-          <p:cNvPr id="3" name="TextBox 2"/>
+          <p:cNvPr id="5" name="TextBox 4"/>
           <p:cNvSpPr txBox="1"/>
           <p:nvPr/>
         </p:nvSpPr>
         <p:spPr>
           <a:xfrm>
-            <a:off x="640080" y="2011680"/>
-            <a:ext cx="7863840" cy="1097280"/>
+            <a:off x="868680" y="1874519"/>
+            <a:ext cx="10058400" cy="365760"/>
           </a:xfrm>
           <a:prstGeom prst="rect">
             <a:avLst/>
@@ -4195,30 +4304,41 @@
           <a:noFill/>
         </p:spPr>
         <p:txBody>
-          <a:bodyPr wrap="square">
+          <a:bodyPr wrap="square" anchor="t">
             <a:spAutoFit/>
           </a:bodyPr>
           <a:lstStyle/>
           <a:p>
-            <a:pPr>
-              <a:defRPr sz="4000" b="1"/>
+            <a:pPr algn="l">
+              <a:spcBef>
+                <a:spcPts val="0"/>
+              </a:spcBef>
+              <a:spcAft>
+                <a:spcPts val="600"/>
+              </a:spcAft>
             </a:pPr>
             <a:r>
-              <a:t>GGG - Good Game Guild</a:t>
-            </a:r>
-          </a:p>
-        </p:txBody>
-      </p:sp>
-      <p:sp>
-        <p:nvSpPr>
-          <p:cNvPr id="4" name="TextBox 3"/>
+              <a:rPr sz="1300" b="1" i="0">
+                <a:solidFill>
+                  <a:srgbClr val="F7BD48"/>
+                </a:solidFill>
+                <a:latin typeface="JetBrains Mono"/>
+              </a:rPr>
+              <a:t>GGG PROTOCOL  //  TRUSTLESS ESCROW</a:t>
+            </a:r>
+          </a:p>
+        </p:txBody>
+      </p:sp>
+      <p:sp>
+        <p:nvSpPr>
+          <p:cNvPr id="6" name="TextBox 5"/>
           <p:cNvSpPr txBox="1"/>
           <p:nvPr/>
         </p:nvSpPr>
         <p:spPr>
           <a:xfrm>
-            <a:off x="640080" y="3200400"/>
-            <a:ext cx="7863840" cy="822960"/>
+            <a:off x="822960" y="2286000"/>
+            <a:ext cx="10515600" cy="1188720"/>
           </a:xfrm>
           <a:prstGeom prst="rect">
             <a:avLst/>
@@ -4226,30 +4346,85 @@
           <a:noFill/>
         </p:spPr>
         <p:txBody>
-          <a:bodyPr wrap="square">
+          <a:bodyPr wrap="square" anchor="t">
             <a:spAutoFit/>
           </a:bodyPr>
           <a:lstStyle/>
           <a:p>
-            <a:pPr>
-              <a:defRPr sz="2200"/>
+            <a:pPr algn="l">
+              <a:spcBef>
+                <a:spcPts val="0"/>
+              </a:spcBef>
+              <a:spcAft>
+                <a:spcPts val="600"/>
+              </a:spcAft>
             </a:pPr>
             <a:r>
-              <a:t>Trustless tournament prize-escrow on Stellar Soroban</a:t>
-            </a:r>
-          </a:p>
-        </p:txBody>
-      </p:sp>
-      <p:sp>
-        <p:nvSpPr>
-          <p:cNvPr id="5" name="TextBox 4"/>
+              <a:rPr sz="4400" b="1" i="0">
+                <a:solidFill>
+                  <a:srgbClr val="F7BD48"/>
+                </a:solidFill>
+                <a:latin typeface="Sora"/>
+              </a:rPr>
+              <a:t>GGG — GOOD GAME GUILD</a:t>
+            </a:r>
+          </a:p>
+        </p:txBody>
+      </p:sp>
+      <p:sp>
+        <p:nvSpPr>
+          <p:cNvPr id="7" name="Rectangle 6"/>
+          <p:cNvSpPr/>
+          <p:nvPr/>
+        </p:nvSpPr>
+        <p:spPr>
+          <a:xfrm>
+            <a:off x="868680" y="3520440"/>
+            <a:ext cx="2194560" cy="50800"/>
+          </a:xfrm>
+          <a:prstGeom prst="rect">
+            <a:avLst/>
+          </a:prstGeom>
+          <a:solidFill>
+            <a:srgbClr val="BA880F"/>
+          </a:solidFill>
+          <a:ln>
+            <a:noFill/>
+          </a:ln>
+          <a:effectLst/>
+        </p:spPr>
+        <p:style>
+          <a:lnRef idx="1">
+            <a:schemeClr val="accent1"/>
+          </a:lnRef>
+          <a:fillRef idx="3">
+            <a:schemeClr val="accent1"/>
+          </a:fillRef>
+          <a:effectRef idx="2">
+            <a:schemeClr val="accent1"/>
+          </a:effectRef>
+          <a:fontRef idx="minor">
+            <a:schemeClr val="lt1"/>
+          </a:fontRef>
+        </p:style>
+        <p:txBody>
+          <a:bodyPr rtlCol="0" anchor="ctr"/>
+          <a:lstStyle/>
+          <a:p>
+            <a:pPr algn="ctr"/>
+          </a:p>
+        </p:txBody>
+      </p:sp>
+      <p:sp>
+        <p:nvSpPr>
+          <p:cNvPr id="8" name="TextBox 7"/>
           <p:cNvSpPr txBox="1"/>
           <p:nvPr/>
         </p:nvSpPr>
         <p:spPr>
           <a:xfrm>
-            <a:off x="640080" y="4206240"/>
-            <a:ext cx="7863840" cy="548640"/>
+            <a:off x="868680" y="3703320"/>
+            <a:ext cx="10058400" cy="640080"/>
           </a:xfrm>
           <a:prstGeom prst="rect">
             <a:avLst/>
@@ -4257,16 +4432,111 @@
           <a:noFill/>
         </p:spPr>
         <p:txBody>
-          <a:bodyPr wrap="square">
+          <a:bodyPr wrap="square" anchor="t">
             <a:spAutoFit/>
           </a:bodyPr>
           <a:lstStyle/>
           <a:p>
-            <a:pPr>
-              <a:defRPr sz="1800"/>
+            <a:pPr algn="l">
+              <a:spcBef>
+                <a:spcPts val="0"/>
+              </a:spcBef>
+              <a:spcAft>
+                <a:spcPts val="600"/>
+              </a:spcAft>
             </a:pPr>
             <a:r>
-              <a:t>Project Lead: [NAME]</a:t>
+              <a:rPr sz="2000" b="0" i="0">
+                <a:solidFill>
+                  <a:srgbClr val="E5E2E1"/>
+                </a:solidFill>
+                <a:latin typeface="Sora"/>
+              </a:rPr>
+              <a:t>Trustless tournament prize-escrow on Stellar Soroban</a:t>
+            </a:r>
+          </a:p>
+        </p:txBody>
+      </p:sp>
+      <p:sp>
+        <p:nvSpPr>
+          <p:cNvPr id="9" name="TextBox 8"/>
+          <p:cNvSpPr txBox="1"/>
+          <p:nvPr/>
+        </p:nvSpPr>
+        <p:spPr>
+          <a:xfrm>
+            <a:off x="868680" y="4572000"/>
+            <a:ext cx="10058400" cy="365760"/>
+          </a:xfrm>
+          <a:prstGeom prst="rect">
+            <a:avLst/>
+          </a:prstGeom>
+          <a:noFill/>
+        </p:spPr>
+        <p:txBody>
+          <a:bodyPr wrap="square" anchor="t">
+            <a:spAutoFit/>
+          </a:bodyPr>
+          <a:lstStyle/>
+          <a:p>
+            <a:pPr algn="l">
+              <a:spcBef>
+                <a:spcPts val="0"/>
+              </a:spcBef>
+              <a:spcAft>
+                <a:spcPts val="600"/>
+              </a:spcAft>
+            </a:pPr>
+            <a:r>
+              <a:rPr sz="1200" b="0" i="0">
+                <a:solidFill>
+                  <a:srgbClr val="D3C4AF"/>
+                </a:solidFill>
+                <a:latin typeface="JetBrains Mono"/>
+              </a:rPr>
+              <a:t>PROJECT LEAD: [NAME]</a:t>
+            </a:r>
+          </a:p>
+        </p:txBody>
+      </p:sp>
+      <p:sp>
+        <p:nvSpPr>
+          <p:cNvPr id="10" name="TextBox 9"/>
+          <p:cNvSpPr txBox="1"/>
+          <p:nvPr/>
+        </p:nvSpPr>
+        <p:spPr>
+          <a:xfrm>
+            <a:off x="868680" y="5623560"/>
+            <a:ext cx="10058400" cy="365760"/>
+          </a:xfrm>
+          <a:prstGeom prst="rect">
+            <a:avLst/>
+          </a:prstGeom>
+          <a:noFill/>
+        </p:spPr>
+        <p:txBody>
+          <a:bodyPr wrap="square" anchor="t">
+            <a:spAutoFit/>
+          </a:bodyPr>
+          <a:lstStyle/>
+          <a:p>
+            <a:pPr algn="l">
+              <a:spcBef>
+                <a:spcPts val="0"/>
+              </a:spcBef>
+              <a:spcAft>
+                <a:spcPts val="600"/>
+              </a:spcAft>
+            </a:pPr>
+            <a:r>
+              <a:rPr sz="1200" b="0" i="1">
+                <a:solidFill>
+                  <a:srgbClr val="F7BD48"/>
+                </a:solidFill>
+                <a:latin typeface="Sora"/>
+              </a:rPr>
+              <a:t>Powered by Soroban</a:t>
             </a:r>
           </a:p>
         </p:txBody>
@@ -4282,6 +4552,14 @@
 <file path=ppt/slides/slide10.xml><?xml version="1.0" encoding="utf-8"?>
 <p:sld xmlns:a="http://schemas.openxmlformats.org/drawingml/2006/main" xmlns:p="http://schemas.openxmlformats.org/presentationml/2006/main" xmlns:r="http://schemas.openxmlformats.org/officeDocument/2006/relationships">
   <p:cSld>
+    <p:bg>
+      <p:bgPr>
+        <a:solidFill>
+          <a:srgbClr val="131313"/>
+        </a:solidFill>
+        <a:effectLst/>
+      </p:bgPr>
+    </p:bg>
     <p:spTree>
       <p:nvGrpSpPr>
         <p:cNvPr id="1" name=""/>
@@ -4291,57 +4569,400 @@
       <p:grpSpPr/>
       <p:sp>
         <p:nvSpPr>
-          <p:cNvPr id="2" name="Title 1"/>
-          <p:cNvSpPr>
-            <a:spLocks noGrp="1"/>
-          </p:cNvSpPr>
-          <p:nvPr>
-            <p:ph type="title"/>
-          </p:nvPr>
-        </p:nvSpPr>
-        <p:spPr/>
-        <p:txBody>
-          <a:bodyPr/>
-          <a:lstStyle/>
-          <a:p>
-            <a:r>
-              <a:t>Team &amp; thanks</a:t>
-            </a:r>
-          </a:p>
-        </p:txBody>
-      </p:sp>
-      <p:sp>
-        <p:nvSpPr>
-          <p:cNvPr id="3" name="Content Placeholder 2"/>
-          <p:cNvSpPr>
-            <a:spLocks noGrp="1"/>
-          </p:cNvSpPr>
-          <p:nvPr>
-            <p:ph idx="1"/>
-          </p:nvPr>
-        </p:nvSpPr>
-        <p:spPr/>
-        <p:txBody>
-          <a:bodyPr wrap="square"/>
-          <a:lstStyle/>
-          <a:p>
-            <a:r>
-              <a:t>Julyza Pena - [role]</a:t>
-            </a:r>
-          </a:p>
-          <a:p>
-            <a:r>
-              <a:t>Mark Hugh Neri - [role]</a:t>
-            </a:r>
-          </a:p>
-          <a:p>
-            <a:r>
+          <p:cNvPr id="2" name="Rectangle 1"/>
+          <p:cNvSpPr/>
+          <p:nvPr/>
+        </p:nvSpPr>
+        <p:spPr>
+          <a:xfrm>
+            <a:off x="0" y="0"/>
+            <a:ext cx="12191695" cy="63500"/>
+          </a:xfrm>
+          <a:prstGeom prst="rect">
+            <a:avLst/>
+          </a:prstGeom>
+          <a:solidFill>
+            <a:srgbClr val="F7BD48"/>
+          </a:solidFill>
+          <a:ln>
+            <a:noFill/>
+          </a:ln>
+          <a:effectLst/>
+        </p:spPr>
+        <p:style>
+          <a:lnRef idx="1">
+            <a:schemeClr val="accent1"/>
+          </a:lnRef>
+          <a:fillRef idx="3">
+            <a:schemeClr val="accent1"/>
+          </a:fillRef>
+          <a:effectRef idx="2">
+            <a:schemeClr val="accent1"/>
+          </a:effectRef>
+          <a:fontRef idx="minor">
+            <a:schemeClr val="lt1"/>
+          </a:fontRef>
+        </p:style>
+        <p:txBody>
+          <a:bodyPr rtlCol="0" anchor="ctr"/>
+          <a:lstStyle/>
+          <a:p>
+            <a:pPr algn="ctr"/>
+          </a:p>
+        </p:txBody>
+      </p:sp>
+      <p:sp>
+        <p:nvSpPr>
+          <p:cNvPr id="3" name="TextBox 2"/>
+          <p:cNvSpPr txBox="1"/>
+          <p:nvPr/>
+        </p:nvSpPr>
+        <p:spPr>
+          <a:xfrm>
+            <a:off x="502920" y="502920"/>
+            <a:ext cx="10058400" cy="365760"/>
+          </a:xfrm>
+          <a:prstGeom prst="rect">
+            <a:avLst/>
+          </a:prstGeom>
+          <a:noFill/>
+        </p:spPr>
+        <p:txBody>
+          <a:bodyPr wrap="square" anchor="t">
+            <a:spAutoFit/>
+          </a:bodyPr>
+          <a:lstStyle/>
+          <a:p>
+            <a:pPr algn="l">
+              <a:spcBef>
+                <a:spcPts val="0"/>
+              </a:spcBef>
+              <a:spcAft>
+                <a:spcPts val="600"/>
+              </a:spcAft>
+            </a:pPr>
+            <a:r>
+              <a:rPr sz="1200" b="1" i="0">
+                <a:solidFill>
+                  <a:srgbClr val="F7BD48"/>
+                </a:solidFill>
+                <a:latin typeface="JetBrains Mono"/>
+              </a:rPr>
+              <a:t>TEAM  //  THANKS</a:t>
+            </a:r>
+          </a:p>
+        </p:txBody>
+      </p:sp>
+      <p:sp>
+        <p:nvSpPr>
+          <p:cNvPr id="4" name="TextBox 3"/>
+          <p:cNvSpPr txBox="1"/>
+          <p:nvPr/>
+        </p:nvSpPr>
+        <p:spPr>
+          <a:xfrm>
+            <a:off x="502920" y="868680"/>
+            <a:ext cx="11155680" cy="1005840"/>
+          </a:xfrm>
+          <a:prstGeom prst="rect">
+            <a:avLst/>
+          </a:prstGeom>
+          <a:noFill/>
+        </p:spPr>
+        <p:txBody>
+          <a:bodyPr wrap="square" anchor="t">
+            <a:spAutoFit/>
+          </a:bodyPr>
+          <a:lstStyle/>
+          <a:p>
+            <a:pPr algn="l">
+              <a:spcBef>
+                <a:spcPts val="0"/>
+              </a:spcBef>
+              <a:spcAft>
+                <a:spcPts val="600"/>
+              </a:spcAft>
+            </a:pPr>
+            <a:r>
+              <a:rPr sz="3000" b="1" i="0">
+                <a:solidFill>
+                  <a:srgbClr val="F7BD48"/>
+                </a:solidFill>
+                <a:latin typeface="Sora"/>
+              </a:rPr>
+              <a:t>The contract holds the money — not us</a:t>
+            </a:r>
+          </a:p>
+        </p:txBody>
+      </p:sp>
+      <p:sp>
+        <p:nvSpPr>
+          <p:cNvPr id="5" name="Rectangle 4"/>
+          <p:cNvSpPr/>
+          <p:nvPr/>
+        </p:nvSpPr>
+        <p:spPr>
+          <a:xfrm>
+            <a:off x="530352" y="1874519"/>
+            <a:ext cx="1463040" cy="38100"/>
+          </a:xfrm>
+          <a:prstGeom prst="rect">
+            <a:avLst/>
+          </a:prstGeom>
+          <a:solidFill>
+            <a:srgbClr val="BA880F"/>
+          </a:solidFill>
+          <a:ln>
+            <a:noFill/>
+          </a:ln>
+          <a:effectLst/>
+        </p:spPr>
+        <p:style>
+          <a:lnRef idx="1">
+            <a:schemeClr val="accent1"/>
+          </a:lnRef>
+          <a:fillRef idx="3">
+            <a:schemeClr val="accent1"/>
+          </a:fillRef>
+          <a:effectRef idx="2">
+            <a:schemeClr val="accent1"/>
+          </a:effectRef>
+          <a:fontRef idx="minor">
+            <a:schemeClr val="lt1"/>
+          </a:fontRef>
+        </p:style>
+        <p:txBody>
+          <a:bodyPr rtlCol="0" anchor="ctr"/>
+          <a:lstStyle/>
+          <a:p>
+            <a:pPr algn="ctr"/>
+          </a:p>
+        </p:txBody>
+      </p:sp>
+      <p:sp>
+        <p:nvSpPr>
+          <p:cNvPr id="6" name="TextBox 5"/>
+          <p:cNvSpPr txBox="1"/>
+          <p:nvPr/>
+        </p:nvSpPr>
+        <p:spPr>
+          <a:xfrm>
+            <a:off x="502920" y="2286000"/>
+            <a:ext cx="11155680" cy="3840480"/>
+          </a:xfrm>
+          <a:prstGeom prst="rect">
+            <a:avLst/>
+          </a:prstGeom>
+          <a:noFill/>
+        </p:spPr>
+        <p:txBody>
+          <a:bodyPr wrap="square">
+            <a:spAutoFit/>
+          </a:bodyPr>
+          <a:lstStyle/>
+          <a:p>
+            <a:pPr>
+              <a:spcBef>
+                <a:spcPts val="0"/>
+              </a:spcBef>
+              <a:spcAft>
+                <a:spcPts val="1400"/>
+              </a:spcAft>
+            </a:pPr>
+            <a:r>
+              <a:rPr sz="1900" b="1">
+                <a:solidFill>
+                  <a:srgbClr val="F7BD48"/>
+                </a:solidFill>
+                <a:latin typeface="JetBrains Mono"/>
+              </a:rPr>
+              <a:t>▪  </a:t>
+            </a:r>
+            <a:r>
+              <a:rPr sz="1900">
+                <a:solidFill>
+                  <a:srgbClr val="E5E2E1"/>
+                </a:solidFill>
+                <a:latin typeface="Sora"/>
+              </a:rPr>
+              <a:t>Julyza Peña — [role]</a:t>
+            </a:r>
+          </a:p>
+          <a:p>
+            <a:pPr>
+              <a:spcBef>
+                <a:spcPts val="0"/>
+              </a:spcBef>
+              <a:spcAft>
+                <a:spcPts val="1400"/>
+              </a:spcAft>
+            </a:pPr>
+            <a:r>
+              <a:rPr sz="1900" b="1">
+                <a:solidFill>
+                  <a:srgbClr val="F7BD48"/>
+                </a:solidFill>
+                <a:latin typeface="JetBrains Mono"/>
+              </a:rPr>
+              <a:t>▪  </a:t>
+            </a:r>
+            <a:r>
+              <a:rPr sz="1900">
+                <a:solidFill>
+                  <a:srgbClr val="E5E2E1"/>
+                </a:solidFill>
+                <a:latin typeface="Sora"/>
+              </a:rPr>
+              <a:t>Mark Hugh Neri — [role]</a:t>
+            </a:r>
+          </a:p>
+          <a:p>
+            <a:pPr>
+              <a:spcBef>
+                <a:spcPts val="0"/>
+              </a:spcBef>
+              <a:spcAft>
+                <a:spcPts val="1400"/>
+              </a:spcAft>
+            </a:pPr>
+            <a:r>
+              <a:rPr sz="1900" b="1">
+                <a:solidFill>
+                  <a:srgbClr val="F7BD48"/>
+                </a:solidFill>
+                <a:latin typeface="JetBrains Mono"/>
+              </a:rPr>
+              <a:t>▪  </a:t>
+            </a:r>
+            <a:r>
+              <a:rPr sz="1900">
+                <a:solidFill>
+                  <a:srgbClr val="E5E2E1"/>
+                </a:solidFill>
+                <a:latin typeface="Sora"/>
+              </a:rPr>
               <a:t>Built on Stellar Soroban</a:t>
             </a:r>
           </a:p>
           <a:p>
-            <a:r>
-              <a:t>Thank you - questions?</a:t>
+            <a:pPr>
+              <a:spcBef>
+                <a:spcPts val="0"/>
+              </a:spcBef>
+              <a:spcAft>
+                <a:spcPts val="1400"/>
+              </a:spcAft>
+            </a:pPr>
+            <a:r>
+              <a:rPr sz="1900" b="1">
+                <a:solidFill>
+                  <a:srgbClr val="F7BD48"/>
+                </a:solidFill>
+                <a:latin typeface="JetBrains Mono"/>
+              </a:rPr>
+              <a:t>▪  </a:t>
+            </a:r>
+            <a:r>
+              <a:rPr sz="1900">
+                <a:solidFill>
+                  <a:srgbClr val="E5E2E1"/>
+                </a:solidFill>
+                <a:latin typeface="Sora"/>
+              </a:rPr>
+              <a:t>Thank you — questions?</a:t>
+            </a:r>
+          </a:p>
+        </p:txBody>
+      </p:sp>
+      <p:sp>
+        <p:nvSpPr>
+          <p:cNvPr id="7" name="TextBox 6"/>
+          <p:cNvSpPr txBox="1"/>
+          <p:nvPr/>
+        </p:nvSpPr>
+        <p:spPr>
+          <a:xfrm>
+            <a:off x="502920" y="6419088"/>
+            <a:ext cx="5486400" cy="320040"/>
+          </a:xfrm>
+          <a:prstGeom prst="rect">
+            <a:avLst/>
+          </a:prstGeom>
+          <a:noFill/>
+        </p:spPr>
+        <p:txBody>
+          <a:bodyPr wrap="square" anchor="t">
+            <a:spAutoFit/>
+          </a:bodyPr>
+          <a:lstStyle/>
+          <a:p>
+            <a:pPr algn="l">
+              <a:spcBef>
+                <a:spcPts val="0"/>
+              </a:spcBef>
+              <a:spcAft>
+                <a:spcPts val="600"/>
+              </a:spcAft>
+            </a:pPr>
+            <a:r>
+              <a:rPr sz="900" b="0" i="0">
+                <a:solidFill>
+                  <a:srgbClr val="D3C4AF"/>
+                </a:solidFill>
+                <a:latin typeface="JetBrains Mono"/>
+              </a:rPr>
+              <a:t>GOOD GAME GUILD</a:t>
+            </a:r>
+          </a:p>
+        </p:txBody>
+      </p:sp>
+      <p:sp>
+        <p:nvSpPr>
+          <p:cNvPr id="8" name="TextBox 7"/>
+          <p:cNvSpPr txBox="1"/>
+          <p:nvPr/>
+        </p:nvSpPr>
+        <p:spPr>
+          <a:xfrm>
+            <a:off x="10241280" y="6419088"/>
+            <a:ext cx="1463040" cy="320040"/>
+          </a:xfrm>
+          <a:prstGeom prst="rect">
+            <a:avLst/>
+          </a:prstGeom>
+          <a:noFill/>
+        </p:spPr>
+        <p:txBody>
+          <a:bodyPr wrap="square" anchor="t">
+            <a:spAutoFit/>
+          </a:bodyPr>
+          <a:lstStyle/>
+          <a:p>
+            <a:pPr algn="r">
+              <a:spcBef>
+                <a:spcPts val="0"/>
+              </a:spcBef>
+              <a:spcAft>
+                <a:spcPts val="600"/>
+              </a:spcAft>
+            </a:pPr>
+            <a:r>
+              <a:rPr sz="900" b="1" i="0">
+                <a:solidFill>
+                  <a:srgbClr val="F7BD48"/>
+                </a:solidFill>
+                <a:latin typeface="JetBrains Mono"/>
+              </a:rPr>
+              <a:t>SOROBAN</a:t>
+            </a:r>
+            <a:r>
+              <a:rPr sz="900" b="0" i="0">
+                <a:solidFill>
+                  <a:srgbClr val="D3C4AF"/>
+                </a:solidFill>
+                <a:latin typeface="JetBrains Mono"/>
+              </a:rPr>
+              <a:t>  ·  10</a:t>
             </a:r>
           </a:p>
         </p:txBody>
@@ -4357,6 +4978,14 @@
 <file path=ppt/slides/slide2.xml><?xml version="1.0" encoding="utf-8"?>
 <p:sld xmlns:a="http://schemas.openxmlformats.org/drawingml/2006/main" xmlns:p="http://schemas.openxmlformats.org/presentationml/2006/main" xmlns:r="http://schemas.openxmlformats.org/officeDocument/2006/relationships">
   <p:cSld>
+    <p:bg>
+      <p:bgPr>
+        <a:solidFill>
+          <a:srgbClr val="131313"/>
+        </a:solidFill>
+        <a:effectLst/>
+      </p:bgPr>
+    </p:bg>
     <p:spTree>
       <p:nvGrpSpPr>
         <p:cNvPr id="1" name=""/>
@@ -4366,14 +4995,104 @@
       <p:grpSpPr/>
       <p:sp>
         <p:nvSpPr>
-          <p:cNvPr id="2" name="TextBox 1"/>
+          <p:cNvPr id="2" name="Rectangle 1"/>
+          <p:cNvSpPr/>
+          <p:nvPr/>
+        </p:nvSpPr>
+        <p:spPr>
+          <a:xfrm>
+            <a:off x="502920" y="457200"/>
+            <a:ext cx="11183112" cy="5577840"/>
+          </a:xfrm>
+          <a:prstGeom prst="rect">
+            <a:avLst/>
+          </a:prstGeom>
+          <a:solidFill>
+            <a:srgbClr val="0E0E0E"/>
+          </a:solidFill>
+          <a:ln w="15875">
+            <a:solidFill>
+              <a:srgbClr val="353534"/>
+            </a:solidFill>
+          </a:ln>
+          <a:effectLst/>
+        </p:spPr>
+        <p:style>
+          <a:lnRef idx="1">
+            <a:schemeClr val="accent1"/>
+          </a:lnRef>
+          <a:fillRef idx="3">
+            <a:schemeClr val="accent1"/>
+          </a:fillRef>
+          <a:effectRef idx="2">
+            <a:schemeClr val="accent1"/>
+          </a:effectRef>
+          <a:fontRef idx="minor">
+            <a:schemeClr val="lt1"/>
+          </a:fontRef>
+        </p:style>
+        <p:txBody>
+          <a:bodyPr rtlCol="0" anchor="ctr"/>
+          <a:lstStyle/>
+          <a:p>
+            <a:pPr algn="ctr"/>
+          </a:p>
+        </p:txBody>
+      </p:sp>
+      <p:sp>
+        <p:nvSpPr>
+          <p:cNvPr id="3" name="Rectangle 2"/>
+          <p:cNvSpPr/>
+          <p:nvPr/>
+        </p:nvSpPr>
+        <p:spPr>
+          <a:xfrm>
+            <a:off x="502920" y="457200"/>
+            <a:ext cx="2011680" cy="50800"/>
+          </a:xfrm>
+          <a:prstGeom prst="rect">
+            <a:avLst/>
+          </a:prstGeom>
+          <a:solidFill>
+            <a:srgbClr val="F7BD48"/>
+          </a:solidFill>
+          <a:ln>
+            <a:noFill/>
+          </a:ln>
+          <a:effectLst/>
+        </p:spPr>
+        <p:style>
+          <a:lnRef idx="1">
+            <a:schemeClr val="accent1"/>
+          </a:lnRef>
+          <a:fillRef idx="3">
+            <a:schemeClr val="accent1"/>
+          </a:fillRef>
+          <a:effectRef idx="2">
+            <a:schemeClr val="accent1"/>
+          </a:effectRef>
+          <a:fontRef idx="minor">
+            <a:schemeClr val="lt1"/>
+          </a:fontRef>
+        </p:style>
+        <p:txBody>
+          <a:bodyPr rtlCol="0" anchor="ctr"/>
+          <a:lstStyle/>
+          <a:p>
+            <a:pPr algn="ctr"/>
+          </a:p>
+        </p:txBody>
+      </p:sp>
+      <p:sp>
+        <p:nvSpPr>
+          <p:cNvPr id="4" name="TextBox 3"/>
           <p:cNvSpPr txBox="1"/>
           <p:nvPr/>
         </p:nvSpPr>
         <p:spPr>
           <a:xfrm>
-            <a:off x="0" y="0"/>
-            <a:ext cx="9144000" cy="6858000"/>
+            <a:off x="502920" y="2926080"/>
+            <a:ext cx="11183112" cy="548640"/>
           </a:xfrm>
           <a:prstGeom prst="rect">
             <a:avLst/>
@@ -4381,15 +5100,26 @@
           <a:noFill/>
         </p:spPr>
         <p:txBody>
-          <a:bodyPr wrap="square">
+          <a:bodyPr wrap="square" anchor="t">
             <a:spAutoFit/>
           </a:bodyPr>
           <a:lstStyle/>
           <a:p>
-            <a:pPr>
-              <a:defRPr sz="2000"/>
+            <a:pPr algn="ctr">
+              <a:spcBef>
+                <a:spcPts val="0"/>
+              </a:spcBef>
+              <a:spcAft>
+                <a:spcPts val="600"/>
+              </a:spcAft>
             </a:pPr>
             <a:r>
+              <a:rPr sz="1300" b="0" i="0">
+                <a:solidFill>
+                  <a:srgbClr val="D3C4AF"/>
+                </a:solidFill>
+                <a:latin typeface="JetBrains Mono"/>
+              </a:rPr>
               <a:t>[FULL-SLIDE IMAGE - see image prompt #2]</a:t>
             </a:r>
           </a:p>
@@ -4397,14 +5127,14 @@
       </p:sp>
       <p:sp>
         <p:nvSpPr>
-          <p:cNvPr id="3" name="TextBox 2"/>
+          <p:cNvPr id="5" name="TextBox 4"/>
           <p:cNvSpPr txBox="1"/>
           <p:nvPr/>
         </p:nvSpPr>
         <p:spPr>
           <a:xfrm>
-            <a:off x="640080" y="548640"/>
-            <a:ext cx="7863840" cy="914400"/>
+            <a:off x="868680" y="777240"/>
+            <a:ext cx="10058400" cy="365760"/>
           </a:xfrm>
           <a:prstGeom prst="rect">
             <a:avLst/>
@@ -4412,30 +5142,41 @@
           <a:noFill/>
         </p:spPr>
         <p:txBody>
-          <a:bodyPr wrap="square">
+          <a:bodyPr wrap="square" anchor="t">
             <a:spAutoFit/>
           </a:bodyPr>
           <a:lstStyle/>
           <a:p>
-            <a:pPr>
-              <a:defRPr sz="3200" b="1"/>
+            <a:pPr algn="l">
+              <a:spcBef>
+                <a:spcPts val="0"/>
+              </a:spcBef>
+              <a:spcAft>
+                <a:spcPts val="600"/>
+              </a:spcAft>
             </a:pPr>
             <a:r>
-              <a:t>Someone always holds the prize money</a:t>
-            </a:r>
-          </a:p>
-        </p:txBody>
-      </p:sp>
-      <p:sp>
-        <p:nvSpPr>
-          <p:cNvPr id="4" name="TextBox 3"/>
+              <a:rPr sz="1300" b="1" i="0">
+                <a:solidFill>
+                  <a:srgbClr val="F7BD48"/>
+                </a:solidFill>
+                <a:latin typeface="JetBrains Mono"/>
+              </a:rPr>
+              <a:t>THE PROBLEM</a:t>
+            </a:r>
+          </a:p>
+        </p:txBody>
+      </p:sp>
+      <p:sp>
+        <p:nvSpPr>
+          <p:cNvPr id="6" name="TextBox 5"/>
           <p:cNvSpPr txBox="1"/>
           <p:nvPr/>
         </p:nvSpPr>
         <p:spPr>
           <a:xfrm>
-            <a:off x="640080" y="4023360"/>
-            <a:ext cx="7863840" cy="2194560"/>
+            <a:off x="822960" y="1143000"/>
+            <a:ext cx="10515600" cy="914400"/>
           </a:xfrm>
           <a:prstGeom prst="rect">
             <a:avLst/>
@@ -4443,31 +5184,124 @@
           <a:noFill/>
         </p:spPr>
         <p:txBody>
+          <a:bodyPr wrap="square" anchor="t">
+            <a:spAutoFit/>
+          </a:bodyPr>
+          <a:lstStyle/>
+          <a:p>
+            <a:pPr algn="l">
+              <a:spcBef>
+                <a:spcPts val="0"/>
+              </a:spcBef>
+              <a:spcAft>
+                <a:spcPts val="600"/>
+              </a:spcAft>
+            </a:pPr>
+            <a:r>
+              <a:rPr sz="3200" b="1" i="0">
+                <a:solidFill>
+                  <a:srgbClr val="F7BD48"/>
+                </a:solidFill>
+                <a:latin typeface="Sora"/>
+              </a:rPr>
+              <a:t>Someone always holds the prize money</a:t>
+            </a:r>
+          </a:p>
+        </p:txBody>
+      </p:sp>
+      <p:sp>
+        <p:nvSpPr>
+          <p:cNvPr id="7" name="TextBox 6"/>
+          <p:cNvSpPr txBox="1"/>
+          <p:nvPr/>
+        </p:nvSpPr>
+        <p:spPr>
+          <a:xfrm>
+            <a:off x="868680" y="3977639"/>
+            <a:ext cx="10058400" cy="2011680"/>
+          </a:xfrm>
+          <a:prstGeom prst="rect">
+            <a:avLst/>
+          </a:prstGeom>
+          <a:noFill/>
+        </p:spPr>
+        <p:txBody>
           <a:bodyPr wrap="square">
             <a:spAutoFit/>
           </a:bodyPr>
           <a:lstStyle/>
           <a:p>
             <a:pPr>
-              <a:defRPr sz="2000"/>
+              <a:spcAft>
+                <a:spcPts val="1200"/>
+              </a:spcAft>
             </a:pPr>
             <a:r>
+              <a:rPr sz="1900" b="1">
+                <a:solidFill>
+                  <a:srgbClr val="F7BD48"/>
+                </a:solidFill>
+                <a:latin typeface="JetBrains Mono"/>
+              </a:rPr>
+              <a:t>▪  </a:t>
+            </a:r>
+            <a:r>
+              <a:rPr sz="1900">
+                <a:solidFill>
+                  <a:srgbClr val="E5E2E1"/>
+                </a:solidFill>
+                <a:latin typeface="Sora"/>
+              </a:rPr>
               <a:t>Custody = risk: skimmed, delayed, frozen</a:t>
             </a:r>
           </a:p>
           <a:p>
             <a:pPr>
-              <a:defRPr sz="2000"/>
+              <a:spcAft>
+                <a:spcPts val="1200"/>
+              </a:spcAft>
             </a:pPr>
             <a:r>
+              <a:rPr sz="1900" b="1">
+                <a:solidFill>
+                  <a:srgbClr val="F7BD48"/>
+                </a:solidFill>
+                <a:latin typeface="JetBrains Mono"/>
+              </a:rPr>
+              <a:t>▪  </a:t>
+            </a:r>
+            <a:r>
+              <a:rPr sz="1900">
+                <a:solidFill>
+                  <a:srgbClr val="E5E2E1"/>
+                </a:solidFill>
+                <a:latin typeface="Sora"/>
+              </a:rPr>
               <a:t>Players must trust a stranger to pay out</a:t>
             </a:r>
           </a:p>
           <a:p>
             <a:pPr>
-              <a:defRPr sz="2000"/>
+              <a:spcAft>
+                <a:spcPts val="1200"/>
+              </a:spcAft>
             </a:pPr>
             <a:r>
+              <a:rPr sz="1900" b="1">
+                <a:solidFill>
+                  <a:srgbClr val="F7BD48"/>
+                </a:solidFill>
+                <a:latin typeface="JetBrains Mono"/>
+              </a:rPr>
+              <a:t>▪  </a:t>
+            </a:r>
+            <a:r>
+              <a:rPr sz="1900">
+                <a:solidFill>
+                  <a:srgbClr val="E5E2E1"/>
+                </a:solidFill>
+                <a:latin typeface="Sora"/>
+              </a:rPr>
               <a:t>No neutral escrow grassroots events can afford</a:t>
             </a:r>
           </a:p>
@@ -4484,6 +5318,14 @@
 <file path=ppt/slides/slide3.xml><?xml version="1.0" encoding="utf-8"?>
 <p:sld xmlns:a="http://schemas.openxmlformats.org/drawingml/2006/main" xmlns:p="http://schemas.openxmlformats.org/presentationml/2006/main" xmlns:r="http://schemas.openxmlformats.org/officeDocument/2006/relationships">
   <p:cSld>
+    <p:bg>
+      <p:bgPr>
+        <a:solidFill>
+          <a:srgbClr val="131313"/>
+        </a:solidFill>
+        <a:effectLst/>
+      </p:bgPr>
+    </p:bg>
     <p:spTree>
       <p:nvGrpSpPr>
         <p:cNvPr id="1" name=""/>
@@ -4493,20 +5335,127 @@
       <p:grpSpPr/>
       <p:sp>
         <p:nvSpPr>
-          <p:cNvPr id="2" name="Title 1"/>
-          <p:cNvSpPr>
-            <a:spLocks noGrp="1"/>
-          </p:cNvSpPr>
-          <p:nvPr>
-            <p:ph type="title"/>
-          </p:nvPr>
-        </p:nvSpPr>
-        <p:spPr/>
-        <p:txBody>
-          <a:bodyPr/>
-          <a:lstStyle/>
-          <a:p>
-            <a:r>
+          <p:cNvPr id="2" name="Rectangle 1"/>
+          <p:cNvSpPr/>
+          <p:nvPr/>
+        </p:nvSpPr>
+        <p:spPr>
+          <a:xfrm>
+            <a:off x="0" y="0"/>
+            <a:ext cx="12191695" cy="63500"/>
+          </a:xfrm>
+          <a:prstGeom prst="rect">
+            <a:avLst/>
+          </a:prstGeom>
+          <a:solidFill>
+            <a:srgbClr val="F7BD48"/>
+          </a:solidFill>
+          <a:ln>
+            <a:noFill/>
+          </a:ln>
+          <a:effectLst/>
+        </p:spPr>
+        <p:style>
+          <a:lnRef idx="1">
+            <a:schemeClr val="accent1"/>
+          </a:lnRef>
+          <a:fillRef idx="3">
+            <a:schemeClr val="accent1"/>
+          </a:fillRef>
+          <a:effectRef idx="2">
+            <a:schemeClr val="accent1"/>
+          </a:effectRef>
+          <a:fontRef idx="minor">
+            <a:schemeClr val="lt1"/>
+          </a:fontRef>
+        </p:style>
+        <p:txBody>
+          <a:bodyPr rtlCol="0" anchor="ctr"/>
+          <a:lstStyle/>
+          <a:p>
+            <a:pPr algn="ctr"/>
+          </a:p>
+        </p:txBody>
+      </p:sp>
+      <p:sp>
+        <p:nvSpPr>
+          <p:cNvPr id="3" name="TextBox 2"/>
+          <p:cNvSpPr txBox="1"/>
+          <p:nvPr/>
+        </p:nvSpPr>
+        <p:spPr>
+          <a:xfrm>
+            <a:off x="502920" y="502920"/>
+            <a:ext cx="10058400" cy="365760"/>
+          </a:xfrm>
+          <a:prstGeom prst="rect">
+            <a:avLst/>
+          </a:prstGeom>
+          <a:noFill/>
+        </p:spPr>
+        <p:txBody>
+          <a:bodyPr wrap="square" anchor="t">
+            <a:spAutoFit/>
+          </a:bodyPr>
+          <a:lstStyle/>
+          <a:p>
+            <a:pPr algn="l">
+              <a:spcBef>
+                <a:spcPts val="0"/>
+              </a:spcBef>
+              <a:spcAft>
+                <a:spcPts val="600"/>
+              </a:spcAft>
+            </a:pPr>
+            <a:r>
+              <a:rPr sz="1200" b="1" i="0">
+                <a:solidFill>
+                  <a:srgbClr val="F7BD48"/>
+                </a:solidFill>
+                <a:latin typeface="JetBrains Mono"/>
+              </a:rPr>
+              <a:t>THE SOLUTION</a:t>
+            </a:r>
+          </a:p>
+        </p:txBody>
+      </p:sp>
+      <p:sp>
+        <p:nvSpPr>
+          <p:cNvPr id="4" name="TextBox 3"/>
+          <p:cNvSpPr txBox="1"/>
+          <p:nvPr/>
+        </p:nvSpPr>
+        <p:spPr>
+          <a:xfrm>
+            <a:off x="502920" y="868680"/>
+            <a:ext cx="11155680" cy="1005840"/>
+          </a:xfrm>
+          <a:prstGeom prst="rect">
+            <a:avLst/>
+          </a:prstGeom>
+          <a:noFill/>
+        </p:spPr>
+        <p:txBody>
+          <a:bodyPr wrap="square" anchor="t">
+            <a:spAutoFit/>
+          </a:bodyPr>
+          <a:lstStyle/>
+          <a:p>
+            <a:pPr algn="l">
+              <a:spcBef>
+                <a:spcPts val="0"/>
+              </a:spcBef>
+              <a:spcAft>
+                <a:spcPts val="600"/>
+              </a:spcAft>
+            </a:pPr>
+            <a:r>
+              <a:rPr sz="3000" b="1" i="0">
+                <a:solidFill>
+                  <a:srgbClr val="F7BD48"/>
+                </a:solidFill>
+                <a:latin typeface="Sora"/>
+              </a:rPr>
               <a:t>The contract holds the money, not a custodian</a:t>
             </a:r>
           </a:p>
@@ -4514,31 +5463,244 @@
       </p:sp>
       <p:sp>
         <p:nvSpPr>
-          <p:cNvPr id="3" name="Content Placeholder 2"/>
-          <p:cNvSpPr>
-            <a:spLocks noGrp="1"/>
-          </p:cNvSpPr>
-          <p:nvPr>
-            <p:ph idx="1"/>
-          </p:nvPr>
-        </p:nvSpPr>
-        <p:spPr/>
-        <p:txBody>
-          <a:bodyPr wrap="square"/>
-          <a:lstStyle/>
-          <a:p>
-            <a:r>
+          <p:cNvPr id="5" name="Rectangle 4"/>
+          <p:cNvSpPr/>
+          <p:nvPr/>
+        </p:nvSpPr>
+        <p:spPr>
+          <a:xfrm>
+            <a:off x="530352" y="1874519"/>
+            <a:ext cx="1463040" cy="38100"/>
+          </a:xfrm>
+          <a:prstGeom prst="rect">
+            <a:avLst/>
+          </a:prstGeom>
+          <a:solidFill>
+            <a:srgbClr val="BA880F"/>
+          </a:solidFill>
+          <a:ln>
+            <a:noFill/>
+          </a:ln>
+          <a:effectLst/>
+        </p:spPr>
+        <p:style>
+          <a:lnRef idx="1">
+            <a:schemeClr val="accent1"/>
+          </a:lnRef>
+          <a:fillRef idx="3">
+            <a:schemeClr val="accent1"/>
+          </a:fillRef>
+          <a:effectRef idx="2">
+            <a:schemeClr val="accent1"/>
+          </a:effectRef>
+          <a:fontRef idx="minor">
+            <a:schemeClr val="lt1"/>
+          </a:fontRef>
+        </p:style>
+        <p:txBody>
+          <a:bodyPr rtlCol="0" anchor="ctr"/>
+          <a:lstStyle/>
+          <a:p>
+            <a:pPr algn="ctr"/>
+          </a:p>
+        </p:txBody>
+      </p:sp>
+      <p:sp>
+        <p:nvSpPr>
+          <p:cNvPr id="6" name="TextBox 5"/>
+          <p:cNvSpPr txBox="1"/>
+          <p:nvPr/>
+        </p:nvSpPr>
+        <p:spPr>
+          <a:xfrm>
+            <a:off x="502920" y="2286000"/>
+            <a:ext cx="11155680" cy="3840480"/>
+          </a:xfrm>
+          <a:prstGeom prst="rect">
+            <a:avLst/>
+          </a:prstGeom>
+          <a:noFill/>
+        </p:spPr>
+        <p:txBody>
+          <a:bodyPr wrap="square">
+            <a:spAutoFit/>
+          </a:bodyPr>
+          <a:lstStyle/>
+          <a:p>
+            <a:pPr>
+              <a:spcBef>
+                <a:spcPts val="0"/>
+              </a:spcBef>
+              <a:spcAft>
+                <a:spcPts val="1400"/>
+              </a:spcAft>
+            </a:pPr>
+            <a:r>
+              <a:rPr sz="1900" b="1">
+                <a:solidFill>
+                  <a:srgbClr val="F7BD48"/>
+                </a:solidFill>
+                <a:latin typeface="JetBrains Mono"/>
+              </a:rPr>
+              <a:t>▪  </a:t>
+            </a:r>
+            <a:r>
+              <a:rPr sz="1900">
+                <a:solidFill>
+                  <a:srgbClr val="E5E2E1"/>
+                </a:solidFill>
+                <a:latin typeface="Sora"/>
+              </a:rPr>
               <a:t>Non-custodial: funds leave only as payout or refund</a:t>
             </a:r>
           </a:p>
           <a:p>
-            <a:r>
+            <a:pPr>
+              <a:spcBef>
+                <a:spcPts val="0"/>
+              </a:spcBef>
+              <a:spcAft>
+                <a:spcPts val="1400"/>
+              </a:spcAft>
+            </a:pPr>
+            <a:r>
+              <a:rPr sz="1900" b="1">
+                <a:solidFill>
+                  <a:srgbClr val="F7BD48"/>
+                </a:solidFill>
+                <a:latin typeface="JetBrains Mono"/>
+              </a:rPr>
+              <a:t>▪  </a:t>
+            </a:r>
+            <a:r>
+              <a:rPr sz="1900">
+                <a:solidFill>
+                  <a:srgbClr val="E5E2E1"/>
+                </a:solidFill>
+                <a:latin typeface="Sora"/>
+              </a:rPr>
               <a:t>Signed client-side in your own Freighter wallet</a:t>
             </a:r>
           </a:p>
           <a:p>
-            <a:r>
+            <a:pPr>
+              <a:spcBef>
+                <a:spcPts val="0"/>
+              </a:spcBef>
+              <a:spcAft>
+                <a:spcPts val="1400"/>
+              </a:spcAft>
+            </a:pPr>
+            <a:r>
+              <a:rPr sz="1900" b="1">
+                <a:solidFill>
+                  <a:srgbClr val="F7BD48"/>
+                </a:solidFill>
+                <a:latin typeface="JetBrains Mono"/>
+              </a:rPr>
+              <a:t>▪  </a:t>
+            </a:r>
+            <a:r>
+              <a:rPr sz="1900">
+                <a:solidFill>
+                  <a:srgbClr val="E5E2E1"/>
+                </a:solidFill>
+                <a:latin typeface="Sora"/>
+              </a:rPr>
               <a:t>XLM or USDC, configurable split (default 60/30/10)</a:t>
+            </a:r>
+          </a:p>
+        </p:txBody>
+      </p:sp>
+      <p:sp>
+        <p:nvSpPr>
+          <p:cNvPr id="7" name="TextBox 6"/>
+          <p:cNvSpPr txBox="1"/>
+          <p:nvPr/>
+        </p:nvSpPr>
+        <p:spPr>
+          <a:xfrm>
+            <a:off x="502920" y="6419088"/>
+            <a:ext cx="5486400" cy="320040"/>
+          </a:xfrm>
+          <a:prstGeom prst="rect">
+            <a:avLst/>
+          </a:prstGeom>
+          <a:noFill/>
+        </p:spPr>
+        <p:txBody>
+          <a:bodyPr wrap="square" anchor="t">
+            <a:spAutoFit/>
+          </a:bodyPr>
+          <a:lstStyle/>
+          <a:p>
+            <a:pPr algn="l">
+              <a:spcBef>
+                <a:spcPts val="0"/>
+              </a:spcBef>
+              <a:spcAft>
+                <a:spcPts val="600"/>
+              </a:spcAft>
+            </a:pPr>
+            <a:r>
+              <a:rPr sz="900" b="0" i="0">
+                <a:solidFill>
+                  <a:srgbClr val="D3C4AF"/>
+                </a:solidFill>
+                <a:latin typeface="JetBrains Mono"/>
+              </a:rPr>
+              <a:t>GOOD GAME GUILD</a:t>
+            </a:r>
+          </a:p>
+        </p:txBody>
+      </p:sp>
+      <p:sp>
+        <p:nvSpPr>
+          <p:cNvPr id="8" name="TextBox 7"/>
+          <p:cNvSpPr txBox="1"/>
+          <p:nvPr/>
+        </p:nvSpPr>
+        <p:spPr>
+          <a:xfrm>
+            <a:off x="10241280" y="6419088"/>
+            <a:ext cx="1463040" cy="320040"/>
+          </a:xfrm>
+          <a:prstGeom prst="rect">
+            <a:avLst/>
+          </a:prstGeom>
+          <a:noFill/>
+        </p:spPr>
+        <p:txBody>
+          <a:bodyPr wrap="square" anchor="t">
+            <a:spAutoFit/>
+          </a:bodyPr>
+          <a:lstStyle/>
+          <a:p>
+            <a:pPr algn="r">
+              <a:spcBef>
+                <a:spcPts val="0"/>
+              </a:spcBef>
+              <a:spcAft>
+                <a:spcPts val="600"/>
+              </a:spcAft>
+            </a:pPr>
+            <a:r>
+              <a:rPr sz="900" b="1" i="0">
+                <a:solidFill>
+                  <a:srgbClr val="F7BD48"/>
+                </a:solidFill>
+                <a:latin typeface="JetBrains Mono"/>
+              </a:rPr>
+              <a:t>SOROBAN</a:t>
+            </a:r>
+            <a:r>
+              <a:rPr sz="900" b="0" i="0">
+                <a:solidFill>
+                  <a:srgbClr val="D3C4AF"/>
+                </a:solidFill>
+                <a:latin typeface="JetBrains Mono"/>
+              </a:rPr>
+              <a:t>  ·  03</a:t>
             </a:r>
           </a:p>
         </p:txBody>
@@ -4554,6 +5716,14 @@
 <file path=ppt/slides/slide4.xml><?xml version="1.0" encoding="utf-8"?>
 <p:sld xmlns:a="http://schemas.openxmlformats.org/drawingml/2006/main" xmlns:p="http://schemas.openxmlformats.org/presentationml/2006/main" xmlns:r="http://schemas.openxmlformats.org/officeDocument/2006/relationships">
   <p:cSld>
+    <p:bg>
+      <p:bgPr>
+        <a:solidFill>
+          <a:srgbClr val="131313"/>
+        </a:solidFill>
+        <a:effectLst/>
+      </p:bgPr>
+    </p:bg>
     <p:spTree>
       <p:nvGrpSpPr>
         <p:cNvPr id="1" name=""/>
@@ -4563,57 +5733,400 @@
       <p:grpSpPr/>
       <p:sp>
         <p:nvSpPr>
-          <p:cNvPr id="2" name="Title 1"/>
-          <p:cNvSpPr>
-            <a:spLocks noGrp="1"/>
-          </p:cNvSpPr>
-          <p:nvPr>
-            <p:ph type="title"/>
-          </p:nvPr>
-        </p:nvSpPr>
-        <p:spPr/>
-        <p:txBody>
-          <a:bodyPr/>
-          <a:lstStyle/>
-          <a:p>
-            <a:r>
-              <a:t>Demo - under two minutes</a:t>
-            </a:r>
-          </a:p>
-        </p:txBody>
-      </p:sp>
-      <p:sp>
-        <p:nvSpPr>
-          <p:cNvPr id="3" name="Content Placeholder 2"/>
-          <p:cNvSpPr>
-            <a:spLocks noGrp="1"/>
-          </p:cNvSpPr>
-          <p:nvPr>
-            <p:ph idx="1"/>
-          </p:nvPr>
-        </p:nvSpPr>
-        <p:spPr/>
-        <p:txBody>
-          <a:bodyPr wrap="square"/>
-          <a:lstStyle/>
-          <a:p>
-            <a:r>
-              <a:t>Create tournament -&gt; QR code appears</a:t>
-            </a:r>
-          </a:p>
-          <a:p>
-            <a:r>
-              <a:t>Players scan &amp; fund -&gt; pool ticks up live</a:t>
-            </a:r>
-          </a:p>
-          <a:p>
-            <a:r>
-              <a:t>Referee settles -&gt; 60/30/10 in one transaction</a:t>
-            </a:r>
-          </a:p>
-          <a:p>
-            <a:r>
+          <p:cNvPr id="2" name="Rectangle 1"/>
+          <p:cNvSpPr/>
+          <p:nvPr/>
+        </p:nvSpPr>
+        <p:spPr>
+          <a:xfrm>
+            <a:off x="0" y="0"/>
+            <a:ext cx="12191695" cy="63500"/>
+          </a:xfrm>
+          <a:prstGeom prst="rect">
+            <a:avLst/>
+          </a:prstGeom>
+          <a:solidFill>
+            <a:srgbClr val="F7BD48"/>
+          </a:solidFill>
+          <a:ln>
+            <a:noFill/>
+          </a:ln>
+          <a:effectLst/>
+        </p:spPr>
+        <p:style>
+          <a:lnRef idx="1">
+            <a:schemeClr val="accent1"/>
+          </a:lnRef>
+          <a:fillRef idx="3">
+            <a:schemeClr val="accent1"/>
+          </a:fillRef>
+          <a:effectRef idx="2">
+            <a:schemeClr val="accent1"/>
+          </a:effectRef>
+          <a:fontRef idx="minor">
+            <a:schemeClr val="lt1"/>
+          </a:fontRef>
+        </p:style>
+        <p:txBody>
+          <a:bodyPr rtlCol="0" anchor="ctr"/>
+          <a:lstStyle/>
+          <a:p>
+            <a:pPr algn="ctr"/>
+          </a:p>
+        </p:txBody>
+      </p:sp>
+      <p:sp>
+        <p:nvSpPr>
+          <p:cNvPr id="3" name="TextBox 2"/>
+          <p:cNvSpPr txBox="1"/>
+          <p:nvPr/>
+        </p:nvSpPr>
+        <p:spPr>
+          <a:xfrm>
+            <a:off x="502920" y="502920"/>
+            <a:ext cx="10058400" cy="365760"/>
+          </a:xfrm>
+          <a:prstGeom prst="rect">
+            <a:avLst/>
+          </a:prstGeom>
+          <a:noFill/>
+        </p:spPr>
+        <p:txBody>
+          <a:bodyPr wrap="square" anchor="t">
+            <a:spAutoFit/>
+          </a:bodyPr>
+          <a:lstStyle/>
+          <a:p>
+            <a:pPr algn="l">
+              <a:spcBef>
+                <a:spcPts val="0"/>
+              </a:spcBef>
+              <a:spcAft>
+                <a:spcPts val="600"/>
+              </a:spcAft>
+            </a:pPr>
+            <a:r>
+              <a:rPr sz="1200" b="1" i="0">
+                <a:solidFill>
+                  <a:srgbClr val="F7BD48"/>
+                </a:solidFill>
+                <a:latin typeface="JetBrains Mono"/>
+              </a:rPr>
+              <a:t>DEMO  //  UNDER TWO MINUTES</a:t>
+            </a:r>
+          </a:p>
+        </p:txBody>
+      </p:sp>
+      <p:sp>
+        <p:nvSpPr>
+          <p:cNvPr id="4" name="TextBox 3"/>
+          <p:cNvSpPr txBox="1"/>
+          <p:nvPr/>
+        </p:nvSpPr>
+        <p:spPr>
+          <a:xfrm>
+            <a:off x="502920" y="868680"/>
+            <a:ext cx="11155680" cy="1005840"/>
+          </a:xfrm>
+          <a:prstGeom prst="rect">
+            <a:avLst/>
+          </a:prstGeom>
+          <a:noFill/>
+        </p:spPr>
+        <p:txBody>
+          <a:bodyPr wrap="square" anchor="t">
+            <a:spAutoFit/>
+          </a:bodyPr>
+          <a:lstStyle/>
+          <a:p>
+            <a:pPr algn="l">
+              <a:spcBef>
+                <a:spcPts val="0"/>
+              </a:spcBef>
+              <a:spcAft>
+                <a:spcPts val="600"/>
+              </a:spcAft>
+            </a:pPr>
+            <a:r>
+              <a:rPr sz="3000" b="1" i="0">
+                <a:solidFill>
+                  <a:srgbClr val="F7BD48"/>
+                </a:solidFill>
+                <a:latin typeface="Sora"/>
+              </a:rPr>
+              <a:t>Create → fund → settle, live on-chain</a:t>
+            </a:r>
+          </a:p>
+        </p:txBody>
+      </p:sp>
+      <p:sp>
+        <p:nvSpPr>
+          <p:cNvPr id="5" name="Rectangle 4"/>
+          <p:cNvSpPr/>
+          <p:nvPr/>
+        </p:nvSpPr>
+        <p:spPr>
+          <a:xfrm>
+            <a:off x="530352" y="1874519"/>
+            <a:ext cx="1463040" cy="38100"/>
+          </a:xfrm>
+          <a:prstGeom prst="rect">
+            <a:avLst/>
+          </a:prstGeom>
+          <a:solidFill>
+            <a:srgbClr val="BA880F"/>
+          </a:solidFill>
+          <a:ln>
+            <a:noFill/>
+          </a:ln>
+          <a:effectLst/>
+        </p:spPr>
+        <p:style>
+          <a:lnRef idx="1">
+            <a:schemeClr val="accent1"/>
+          </a:lnRef>
+          <a:fillRef idx="3">
+            <a:schemeClr val="accent1"/>
+          </a:fillRef>
+          <a:effectRef idx="2">
+            <a:schemeClr val="accent1"/>
+          </a:effectRef>
+          <a:fontRef idx="minor">
+            <a:schemeClr val="lt1"/>
+          </a:fontRef>
+        </p:style>
+        <p:txBody>
+          <a:bodyPr rtlCol="0" anchor="ctr"/>
+          <a:lstStyle/>
+          <a:p>
+            <a:pPr algn="ctr"/>
+          </a:p>
+        </p:txBody>
+      </p:sp>
+      <p:sp>
+        <p:nvSpPr>
+          <p:cNvPr id="6" name="TextBox 5"/>
+          <p:cNvSpPr txBox="1"/>
+          <p:nvPr/>
+        </p:nvSpPr>
+        <p:spPr>
+          <a:xfrm>
+            <a:off x="502920" y="2286000"/>
+            <a:ext cx="11155680" cy="3840480"/>
+          </a:xfrm>
+          <a:prstGeom prst="rect">
+            <a:avLst/>
+          </a:prstGeom>
+          <a:noFill/>
+        </p:spPr>
+        <p:txBody>
+          <a:bodyPr wrap="square">
+            <a:spAutoFit/>
+          </a:bodyPr>
+          <a:lstStyle/>
+          <a:p>
+            <a:pPr>
+              <a:spcBef>
+                <a:spcPts val="0"/>
+              </a:spcBef>
+              <a:spcAft>
+                <a:spcPts val="1400"/>
+              </a:spcAft>
+            </a:pPr>
+            <a:r>
+              <a:rPr sz="1900" b="1">
+                <a:solidFill>
+                  <a:srgbClr val="F7BD48"/>
+                </a:solidFill>
+                <a:latin typeface="JetBrains Mono"/>
+              </a:rPr>
+              <a:t>▪  </a:t>
+            </a:r>
+            <a:r>
+              <a:rPr sz="1900">
+                <a:solidFill>
+                  <a:srgbClr val="E5E2E1"/>
+                </a:solidFill>
+                <a:latin typeface="Sora"/>
+              </a:rPr>
+              <a:t>Create tournament → QR code appears</a:t>
+            </a:r>
+          </a:p>
+          <a:p>
+            <a:pPr>
+              <a:spcBef>
+                <a:spcPts val="0"/>
+              </a:spcBef>
+              <a:spcAft>
+                <a:spcPts val="1400"/>
+              </a:spcAft>
+            </a:pPr>
+            <a:r>
+              <a:rPr sz="1900" b="1">
+                <a:solidFill>
+                  <a:srgbClr val="F7BD48"/>
+                </a:solidFill>
+                <a:latin typeface="JetBrains Mono"/>
+              </a:rPr>
+              <a:t>▪  </a:t>
+            </a:r>
+            <a:r>
+              <a:rPr sz="1900">
+                <a:solidFill>
+                  <a:srgbClr val="E5E2E1"/>
+                </a:solidFill>
+                <a:latin typeface="Sora"/>
+              </a:rPr>
+              <a:t>Players scan &amp; fund → pool ticks up live</a:t>
+            </a:r>
+          </a:p>
+          <a:p>
+            <a:pPr>
+              <a:spcBef>
+                <a:spcPts val="0"/>
+              </a:spcBef>
+              <a:spcAft>
+                <a:spcPts val="1400"/>
+              </a:spcAft>
+            </a:pPr>
+            <a:r>
+              <a:rPr sz="1900" b="1">
+                <a:solidFill>
+                  <a:srgbClr val="F7BD48"/>
+                </a:solidFill>
+                <a:latin typeface="JetBrains Mono"/>
+              </a:rPr>
+              <a:t>▪  </a:t>
+            </a:r>
+            <a:r>
+              <a:rPr sz="1900">
+                <a:solidFill>
+                  <a:srgbClr val="E5E2E1"/>
+                </a:solidFill>
+                <a:latin typeface="Sora"/>
+              </a:rPr>
+              <a:t>Referee settles → 60/30/10 in one transaction</a:t>
+            </a:r>
+          </a:p>
+          <a:p>
+            <a:pPr>
+              <a:spcBef>
+                <a:spcPts val="0"/>
+              </a:spcBef>
+              <a:spcAft>
+                <a:spcPts val="1400"/>
+              </a:spcAft>
+            </a:pPr>
+            <a:r>
+              <a:rPr sz="1900" b="1">
+                <a:solidFill>
+                  <a:srgbClr val="F7BD48"/>
+                </a:solidFill>
+                <a:latin typeface="JetBrains Mono"/>
+              </a:rPr>
+              <a:t>▪  </a:t>
+            </a:r>
+            <a:r>
+              <a:rPr sz="1900">
+                <a:solidFill>
+                  <a:srgbClr val="E5E2E1"/>
+                </a:solidFill>
+                <a:latin typeface="Sora"/>
+              </a:rPr>
               <a:t>Three payouts, verifiable on the explorer</a:t>
+            </a:r>
+          </a:p>
+        </p:txBody>
+      </p:sp>
+      <p:sp>
+        <p:nvSpPr>
+          <p:cNvPr id="7" name="TextBox 6"/>
+          <p:cNvSpPr txBox="1"/>
+          <p:nvPr/>
+        </p:nvSpPr>
+        <p:spPr>
+          <a:xfrm>
+            <a:off x="502920" y="6419088"/>
+            <a:ext cx="5486400" cy="320040"/>
+          </a:xfrm>
+          <a:prstGeom prst="rect">
+            <a:avLst/>
+          </a:prstGeom>
+          <a:noFill/>
+        </p:spPr>
+        <p:txBody>
+          <a:bodyPr wrap="square" anchor="t">
+            <a:spAutoFit/>
+          </a:bodyPr>
+          <a:lstStyle/>
+          <a:p>
+            <a:pPr algn="l">
+              <a:spcBef>
+                <a:spcPts val="0"/>
+              </a:spcBef>
+              <a:spcAft>
+                <a:spcPts val="600"/>
+              </a:spcAft>
+            </a:pPr>
+            <a:r>
+              <a:rPr sz="900" b="0" i="0">
+                <a:solidFill>
+                  <a:srgbClr val="D3C4AF"/>
+                </a:solidFill>
+                <a:latin typeface="JetBrains Mono"/>
+              </a:rPr>
+              <a:t>GOOD GAME GUILD</a:t>
+            </a:r>
+          </a:p>
+        </p:txBody>
+      </p:sp>
+      <p:sp>
+        <p:nvSpPr>
+          <p:cNvPr id="8" name="TextBox 7"/>
+          <p:cNvSpPr txBox="1"/>
+          <p:nvPr/>
+        </p:nvSpPr>
+        <p:spPr>
+          <a:xfrm>
+            <a:off x="10241280" y="6419088"/>
+            <a:ext cx="1463040" cy="320040"/>
+          </a:xfrm>
+          <a:prstGeom prst="rect">
+            <a:avLst/>
+          </a:prstGeom>
+          <a:noFill/>
+        </p:spPr>
+        <p:txBody>
+          <a:bodyPr wrap="square" anchor="t">
+            <a:spAutoFit/>
+          </a:bodyPr>
+          <a:lstStyle/>
+          <a:p>
+            <a:pPr algn="r">
+              <a:spcBef>
+                <a:spcPts val="0"/>
+              </a:spcBef>
+              <a:spcAft>
+                <a:spcPts val="600"/>
+              </a:spcAft>
+            </a:pPr>
+            <a:r>
+              <a:rPr sz="900" b="1" i="0">
+                <a:solidFill>
+                  <a:srgbClr val="F7BD48"/>
+                </a:solidFill>
+                <a:latin typeface="JetBrains Mono"/>
+              </a:rPr>
+              <a:t>SOROBAN</a:t>
+            </a:r>
+            <a:r>
+              <a:rPr sz="900" b="0" i="0">
+                <a:solidFill>
+                  <a:srgbClr val="D3C4AF"/>
+                </a:solidFill>
+                <a:latin typeface="JetBrains Mono"/>
+              </a:rPr>
+              <a:t>  ·  04</a:t>
             </a:r>
           </a:p>
         </p:txBody>
@@ -4629,6 +6142,14 @@
 <file path=ppt/slides/slide5.xml><?xml version="1.0" encoding="utf-8"?>
 <p:sld xmlns:a="http://schemas.openxmlformats.org/drawingml/2006/main" xmlns:p="http://schemas.openxmlformats.org/presentationml/2006/main" xmlns:r="http://schemas.openxmlformats.org/officeDocument/2006/relationships">
   <p:cSld>
+    <p:bg>
+      <p:bgPr>
+        <a:solidFill>
+          <a:srgbClr val="131313"/>
+        </a:solidFill>
+        <a:effectLst/>
+      </p:bgPr>
+    </p:bg>
     <p:spTree>
       <p:nvGrpSpPr>
         <p:cNvPr id="1" name=""/>
@@ -4638,57 +6159,400 @@
       <p:grpSpPr/>
       <p:sp>
         <p:nvSpPr>
-          <p:cNvPr id="2" name="Title 1"/>
-          <p:cNvSpPr>
-            <a:spLocks noGrp="1"/>
-          </p:cNvSpPr>
-          <p:nvPr>
-            <p:ph type="title"/>
-          </p:nvPr>
-        </p:nvSpPr>
-        <p:spPr/>
-        <p:txBody>
-          <a:bodyPr/>
-          <a:lstStyle/>
-          <a:p>
-            <a:r>
-              <a:t>How it works</a:t>
-            </a:r>
-          </a:p>
-        </p:txBody>
-      </p:sp>
-      <p:sp>
-        <p:nvSpPr>
-          <p:cNvPr id="3" name="Content Placeholder 2"/>
-          <p:cNvSpPr>
-            <a:spLocks noGrp="1"/>
-          </p:cNvSpPr>
-          <p:nvPr>
-            <p:ph idx="1"/>
-          </p:nvPr>
-        </p:nvSpPr>
-        <p:spPr/>
-        <p:txBody>
-          <a:bodyPr wrap="square"/>
-          <a:lstStyle/>
-          <a:p>
-            <a:r>
+          <p:cNvPr id="2" name="Rectangle 1"/>
+          <p:cNvSpPr/>
+          <p:nvPr/>
+        </p:nvSpPr>
+        <p:spPr>
+          <a:xfrm>
+            <a:off x="0" y="0"/>
+            <a:ext cx="12191695" cy="63500"/>
+          </a:xfrm>
+          <a:prstGeom prst="rect">
+            <a:avLst/>
+          </a:prstGeom>
+          <a:solidFill>
+            <a:srgbClr val="F7BD48"/>
+          </a:solidFill>
+          <a:ln>
+            <a:noFill/>
+          </a:ln>
+          <a:effectLst/>
+        </p:spPr>
+        <p:style>
+          <a:lnRef idx="1">
+            <a:schemeClr val="accent1"/>
+          </a:lnRef>
+          <a:fillRef idx="3">
+            <a:schemeClr val="accent1"/>
+          </a:fillRef>
+          <a:effectRef idx="2">
+            <a:schemeClr val="accent1"/>
+          </a:effectRef>
+          <a:fontRef idx="minor">
+            <a:schemeClr val="lt1"/>
+          </a:fontRef>
+        </p:style>
+        <p:txBody>
+          <a:bodyPr rtlCol="0" anchor="ctr"/>
+          <a:lstStyle/>
+          <a:p>
+            <a:pPr algn="ctr"/>
+          </a:p>
+        </p:txBody>
+      </p:sp>
+      <p:sp>
+        <p:nvSpPr>
+          <p:cNvPr id="3" name="TextBox 2"/>
+          <p:cNvSpPr txBox="1"/>
+          <p:nvPr/>
+        </p:nvSpPr>
+        <p:spPr>
+          <a:xfrm>
+            <a:off x="502920" y="502920"/>
+            <a:ext cx="10058400" cy="365760"/>
+          </a:xfrm>
+          <a:prstGeom prst="rect">
+            <a:avLst/>
+          </a:prstGeom>
+          <a:noFill/>
+        </p:spPr>
+        <p:txBody>
+          <a:bodyPr wrap="square" anchor="t">
+            <a:spAutoFit/>
+          </a:bodyPr>
+          <a:lstStyle/>
+          <a:p>
+            <a:pPr algn="l">
+              <a:spcBef>
+                <a:spcPts val="0"/>
+              </a:spcBef>
+              <a:spcAft>
+                <a:spcPts val="600"/>
+              </a:spcAft>
+            </a:pPr>
+            <a:r>
+              <a:rPr sz="1200" b="1" i="0">
+                <a:solidFill>
+                  <a:srgbClr val="F7BD48"/>
+                </a:solidFill>
+                <a:latin typeface="JetBrains Mono"/>
+              </a:rPr>
+              <a:t>HOW IT WORKS</a:t>
+            </a:r>
+          </a:p>
+        </p:txBody>
+      </p:sp>
+      <p:sp>
+        <p:nvSpPr>
+          <p:cNvPr id="4" name="TextBox 3"/>
+          <p:cNvSpPr txBox="1"/>
+          <p:nvPr/>
+        </p:nvSpPr>
+        <p:spPr>
+          <a:xfrm>
+            <a:off x="502920" y="868680"/>
+            <a:ext cx="11155680" cy="1005840"/>
+          </a:xfrm>
+          <a:prstGeom prst="rect">
+            <a:avLst/>
+          </a:prstGeom>
+          <a:noFill/>
+        </p:spPr>
+        <p:txBody>
+          <a:bodyPr wrap="square" anchor="t">
+            <a:spAutoFit/>
+          </a:bodyPr>
+          <a:lstStyle/>
+          <a:p>
+            <a:pPr algn="l">
+              <a:spcBef>
+                <a:spcPts val="0"/>
+              </a:spcBef>
+              <a:spcAft>
+                <a:spcPts val="600"/>
+              </a:spcAft>
+            </a:pPr>
+            <a:r>
+              <a:rPr sz="3000" b="1" i="0">
+                <a:solidFill>
+                  <a:srgbClr val="F7BD48"/>
+                </a:solidFill>
+                <a:latin typeface="Sora"/>
+              </a:rPr>
+              <a:t>Four pieces, one discipline: the server never signs</a:t>
+            </a:r>
+          </a:p>
+        </p:txBody>
+      </p:sp>
+      <p:sp>
+        <p:nvSpPr>
+          <p:cNvPr id="5" name="Rectangle 4"/>
+          <p:cNvSpPr/>
+          <p:nvPr/>
+        </p:nvSpPr>
+        <p:spPr>
+          <a:xfrm>
+            <a:off x="530352" y="1874519"/>
+            <a:ext cx="1463040" cy="38100"/>
+          </a:xfrm>
+          <a:prstGeom prst="rect">
+            <a:avLst/>
+          </a:prstGeom>
+          <a:solidFill>
+            <a:srgbClr val="BA880F"/>
+          </a:solidFill>
+          <a:ln>
+            <a:noFill/>
+          </a:ln>
+          <a:effectLst/>
+        </p:spPr>
+        <p:style>
+          <a:lnRef idx="1">
+            <a:schemeClr val="accent1"/>
+          </a:lnRef>
+          <a:fillRef idx="3">
+            <a:schemeClr val="accent1"/>
+          </a:fillRef>
+          <a:effectRef idx="2">
+            <a:schemeClr val="accent1"/>
+          </a:effectRef>
+          <a:fontRef idx="minor">
+            <a:schemeClr val="lt1"/>
+          </a:fontRef>
+        </p:style>
+        <p:txBody>
+          <a:bodyPr rtlCol="0" anchor="ctr"/>
+          <a:lstStyle/>
+          <a:p>
+            <a:pPr algn="ctr"/>
+          </a:p>
+        </p:txBody>
+      </p:sp>
+      <p:sp>
+        <p:nvSpPr>
+          <p:cNvPr id="6" name="TextBox 5"/>
+          <p:cNvSpPr txBox="1"/>
+          <p:nvPr/>
+        </p:nvSpPr>
+        <p:spPr>
+          <a:xfrm>
+            <a:off x="502920" y="2286000"/>
+            <a:ext cx="11155680" cy="3840480"/>
+          </a:xfrm>
+          <a:prstGeom prst="rect">
+            <a:avLst/>
+          </a:prstGeom>
+          <a:noFill/>
+        </p:spPr>
+        <p:txBody>
+          <a:bodyPr wrap="square">
+            <a:spAutoFit/>
+          </a:bodyPr>
+          <a:lstStyle/>
+          <a:p>
+            <a:pPr>
+              <a:spcBef>
+                <a:spcPts val="0"/>
+              </a:spcBef>
+              <a:spcAft>
+                <a:spcPts val="1400"/>
+              </a:spcAft>
+            </a:pPr>
+            <a:r>
+              <a:rPr sz="1900" b="1">
+                <a:solidFill>
+                  <a:srgbClr val="F7BD48"/>
+                </a:solidFill>
+                <a:latin typeface="JetBrains Mono"/>
+              </a:rPr>
+              <a:t>▪  </a:t>
+            </a:r>
+            <a:r>
+              <a:rPr sz="1900">
+                <a:solidFill>
+                  <a:srgbClr val="E5E2E1"/>
+                </a:solidFill>
+                <a:latin typeface="Sora"/>
+              </a:rPr>
               <a:t>Soroban escrow contract (Rust, 7 fns, 28 tests)</a:t>
             </a:r>
           </a:p>
           <a:p>
-            <a:r>
-              <a:t>Next.js app builds &amp; submits XDR - never signs</a:t>
-            </a:r>
-          </a:p>
-          <a:p>
-            <a:r>
+            <a:pPr>
+              <a:spcBef>
+                <a:spcPts val="0"/>
+              </a:spcBef>
+              <a:spcAft>
+                <a:spcPts val="1400"/>
+              </a:spcAft>
+            </a:pPr>
+            <a:r>
+              <a:rPr sz="1900" b="1">
+                <a:solidFill>
+                  <a:srgbClr val="F7BD48"/>
+                </a:solidFill>
+                <a:latin typeface="JetBrains Mono"/>
+              </a:rPr>
+              <a:t>▪  </a:t>
+            </a:r>
+            <a:r>
+              <a:rPr sz="1900">
+                <a:solidFill>
+                  <a:srgbClr val="E5E2E1"/>
+                </a:solidFill>
+                <a:latin typeface="Sora"/>
+              </a:rPr>
+              <a:t>Next.js app builds &amp; submits XDR — never signs</a:t>
+            </a:r>
+          </a:p>
+          <a:p>
+            <a:pPr>
+              <a:spcBef>
+                <a:spcPts val="0"/>
+              </a:spcBef>
+              <a:spcAft>
+                <a:spcPts val="1400"/>
+              </a:spcAft>
+            </a:pPr>
+            <a:r>
+              <a:rPr sz="1900" b="1">
+                <a:solidFill>
+                  <a:srgbClr val="F7BD48"/>
+                </a:solidFill>
+                <a:latin typeface="JetBrains Mono"/>
+              </a:rPr>
+              <a:t>▪  </a:t>
+            </a:r>
+            <a:r>
+              <a:rPr sz="1900">
+                <a:solidFill>
+                  <a:srgbClr val="E5E2E1"/>
+                </a:solidFill>
+                <a:latin typeface="Sora"/>
+              </a:rPr>
               <a:t>Freighter signs client-side; no server keys</a:t>
             </a:r>
           </a:p>
           <a:p>
-            <a:r>
-              <a:t>Subscriber -&gt; Redis -&gt; live SSE feed</a:t>
+            <a:pPr>
+              <a:spcBef>
+                <a:spcPts val="0"/>
+              </a:spcBef>
+              <a:spcAft>
+                <a:spcPts val="1400"/>
+              </a:spcAft>
+            </a:pPr>
+            <a:r>
+              <a:rPr sz="1900" b="1">
+                <a:solidFill>
+                  <a:srgbClr val="F7BD48"/>
+                </a:solidFill>
+                <a:latin typeface="JetBrains Mono"/>
+              </a:rPr>
+              <a:t>▪  </a:t>
+            </a:r>
+            <a:r>
+              <a:rPr sz="1900">
+                <a:solidFill>
+                  <a:srgbClr val="E5E2E1"/>
+                </a:solidFill>
+                <a:latin typeface="Sora"/>
+              </a:rPr>
+              <a:t>Subscriber → Redis → live SSE feed</a:t>
+            </a:r>
+          </a:p>
+        </p:txBody>
+      </p:sp>
+      <p:sp>
+        <p:nvSpPr>
+          <p:cNvPr id="7" name="TextBox 6"/>
+          <p:cNvSpPr txBox="1"/>
+          <p:nvPr/>
+        </p:nvSpPr>
+        <p:spPr>
+          <a:xfrm>
+            <a:off x="502920" y="6419088"/>
+            <a:ext cx="5486400" cy="320040"/>
+          </a:xfrm>
+          <a:prstGeom prst="rect">
+            <a:avLst/>
+          </a:prstGeom>
+          <a:noFill/>
+        </p:spPr>
+        <p:txBody>
+          <a:bodyPr wrap="square" anchor="t">
+            <a:spAutoFit/>
+          </a:bodyPr>
+          <a:lstStyle/>
+          <a:p>
+            <a:pPr algn="l">
+              <a:spcBef>
+                <a:spcPts val="0"/>
+              </a:spcBef>
+              <a:spcAft>
+                <a:spcPts val="600"/>
+              </a:spcAft>
+            </a:pPr>
+            <a:r>
+              <a:rPr sz="900" b="0" i="0">
+                <a:solidFill>
+                  <a:srgbClr val="D3C4AF"/>
+                </a:solidFill>
+                <a:latin typeface="JetBrains Mono"/>
+              </a:rPr>
+              <a:t>GOOD GAME GUILD</a:t>
+            </a:r>
+          </a:p>
+        </p:txBody>
+      </p:sp>
+      <p:sp>
+        <p:nvSpPr>
+          <p:cNvPr id="8" name="TextBox 7"/>
+          <p:cNvSpPr txBox="1"/>
+          <p:nvPr/>
+        </p:nvSpPr>
+        <p:spPr>
+          <a:xfrm>
+            <a:off x="10241280" y="6419088"/>
+            <a:ext cx="1463040" cy="320040"/>
+          </a:xfrm>
+          <a:prstGeom prst="rect">
+            <a:avLst/>
+          </a:prstGeom>
+          <a:noFill/>
+        </p:spPr>
+        <p:txBody>
+          <a:bodyPr wrap="square" anchor="t">
+            <a:spAutoFit/>
+          </a:bodyPr>
+          <a:lstStyle/>
+          <a:p>
+            <a:pPr algn="r">
+              <a:spcBef>
+                <a:spcPts val="0"/>
+              </a:spcBef>
+              <a:spcAft>
+                <a:spcPts val="600"/>
+              </a:spcAft>
+            </a:pPr>
+            <a:r>
+              <a:rPr sz="900" b="1" i="0">
+                <a:solidFill>
+                  <a:srgbClr val="F7BD48"/>
+                </a:solidFill>
+                <a:latin typeface="JetBrains Mono"/>
+              </a:rPr>
+              <a:t>SOROBAN</a:t>
+            </a:r>
+            <a:r>
+              <a:rPr sz="900" b="0" i="0">
+                <a:solidFill>
+                  <a:srgbClr val="D3C4AF"/>
+                </a:solidFill>
+                <a:latin typeface="JetBrains Mono"/>
+              </a:rPr>
+              <a:t>  ·  05</a:t>
             </a:r>
           </a:p>
         </p:txBody>
@@ -4704,6 +6568,14 @@
 <file path=ppt/slides/slide6.xml><?xml version="1.0" encoding="utf-8"?>
 <p:sld xmlns:a="http://schemas.openxmlformats.org/drawingml/2006/main" xmlns:p="http://schemas.openxmlformats.org/presentationml/2006/main" xmlns:r="http://schemas.openxmlformats.org/officeDocument/2006/relationships">
   <p:cSld>
+    <p:bg>
+      <p:bgPr>
+        <a:solidFill>
+          <a:srgbClr val="131313"/>
+        </a:solidFill>
+        <a:effectLst/>
+      </p:bgPr>
+    </p:bg>
     <p:spTree>
       <p:nvGrpSpPr>
         <p:cNvPr id="1" name=""/>
@@ -4713,57 +6585,400 @@
       <p:grpSpPr/>
       <p:sp>
         <p:nvSpPr>
-          <p:cNvPr id="2" name="Title 1"/>
-          <p:cNvSpPr>
-            <a:spLocks noGrp="1"/>
-          </p:cNvSpPr>
-          <p:nvPr>
-            <p:ph type="title"/>
-          </p:nvPr>
-        </p:nvSpPr>
-        <p:spPr/>
-        <p:txBody>
-          <a:bodyPr/>
-          <a:lstStyle/>
-          <a:p>
-            <a:r>
-              <a:t>Impact to the Stellar Ecosystem</a:t>
-            </a:r>
-          </a:p>
-        </p:txBody>
-      </p:sp>
-      <p:sp>
-        <p:nvSpPr>
-          <p:cNvPr id="3" name="Content Placeholder 2"/>
-          <p:cNvSpPr>
-            <a:spLocks noGrp="1"/>
-          </p:cNvSpPr>
-          <p:nvPr>
-            <p:ph idx="1"/>
-          </p:nvPr>
-        </p:nvSpPr>
-        <p:spPr/>
-        <p:txBody>
-          <a:bodyPr wrap="square"/>
-          <a:lstStyle/>
-          <a:p>
-            <a:r>
+          <p:cNvPr id="2" name="Rectangle 1"/>
+          <p:cNvSpPr/>
+          <p:nvPr/>
+        </p:nvSpPr>
+        <p:spPr>
+          <a:xfrm>
+            <a:off x="0" y="0"/>
+            <a:ext cx="12191695" cy="63500"/>
+          </a:xfrm>
+          <a:prstGeom prst="rect">
+            <a:avLst/>
+          </a:prstGeom>
+          <a:solidFill>
+            <a:srgbClr val="F7BD48"/>
+          </a:solidFill>
+          <a:ln>
+            <a:noFill/>
+          </a:ln>
+          <a:effectLst/>
+        </p:spPr>
+        <p:style>
+          <a:lnRef idx="1">
+            <a:schemeClr val="accent1"/>
+          </a:lnRef>
+          <a:fillRef idx="3">
+            <a:schemeClr val="accent1"/>
+          </a:fillRef>
+          <a:effectRef idx="2">
+            <a:schemeClr val="accent1"/>
+          </a:effectRef>
+          <a:fontRef idx="minor">
+            <a:schemeClr val="lt1"/>
+          </a:fontRef>
+        </p:style>
+        <p:txBody>
+          <a:bodyPr rtlCol="0" anchor="ctr"/>
+          <a:lstStyle/>
+          <a:p>
+            <a:pPr algn="ctr"/>
+          </a:p>
+        </p:txBody>
+      </p:sp>
+      <p:sp>
+        <p:nvSpPr>
+          <p:cNvPr id="3" name="TextBox 2"/>
+          <p:cNvSpPr txBox="1"/>
+          <p:nvPr/>
+        </p:nvSpPr>
+        <p:spPr>
+          <a:xfrm>
+            <a:off x="502920" y="502920"/>
+            <a:ext cx="10058400" cy="365760"/>
+          </a:xfrm>
+          <a:prstGeom prst="rect">
+            <a:avLst/>
+          </a:prstGeom>
+          <a:noFill/>
+        </p:spPr>
+        <p:txBody>
+          <a:bodyPr wrap="square" anchor="t">
+            <a:spAutoFit/>
+          </a:bodyPr>
+          <a:lstStyle/>
+          <a:p>
+            <a:pPr algn="l">
+              <a:spcBef>
+                <a:spcPts val="0"/>
+              </a:spcBef>
+              <a:spcAft>
+                <a:spcPts val="600"/>
+              </a:spcAft>
+            </a:pPr>
+            <a:r>
+              <a:rPr sz="1200" b="1" i="0">
+                <a:solidFill>
+                  <a:srgbClr val="F7BD48"/>
+                </a:solidFill>
+                <a:latin typeface="JetBrains Mono"/>
+              </a:rPr>
+              <a:t>IMPACT  //  STELLAR ECOSYSTEM</a:t>
+            </a:r>
+          </a:p>
+        </p:txBody>
+      </p:sp>
+      <p:sp>
+        <p:nvSpPr>
+          <p:cNvPr id="4" name="TextBox 3"/>
+          <p:cNvSpPr txBox="1"/>
+          <p:nvPr/>
+        </p:nvSpPr>
+        <p:spPr>
+          <a:xfrm>
+            <a:off x="502920" y="868680"/>
+            <a:ext cx="11155680" cy="1005840"/>
+          </a:xfrm>
+          <a:prstGeom prst="rect">
+            <a:avLst/>
+          </a:prstGeom>
+          <a:noFill/>
+        </p:spPr>
+        <p:txBody>
+          <a:bodyPr wrap="square" anchor="t">
+            <a:spAutoFit/>
+          </a:bodyPr>
+          <a:lstStyle/>
+          <a:p>
+            <a:pPr algn="l">
+              <a:spcBef>
+                <a:spcPts val="0"/>
+              </a:spcBef>
+              <a:spcAft>
+                <a:spcPts val="600"/>
+              </a:spcAft>
+            </a:pPr>
+            <a:r>
+              <a:rPr sz="3000" b="1" i="0">
+                <a:solidFill>
+                  <a:srgbClr val="F7BD48"/>
+                </a:solidFill>
+                <a:latin typeface="Sora"/>
+              </a:rPr>
+              <a:t>Real on-chain volume for the network</a:t>
+            </a:r>
+          </a:p>
+        </p:txBody>
+      </p:sp>
+      <p:sp>
+        <p:nvSpPr>
+          <p:cNvPr id="5" name="Rectangle 4"/>
+          <p:cNvSpPr/>
+          <p:nvPr/>
+        </p:nvSpPr>
+        <p:spPr>
+          <a:xfrm>
+            <a:off x="530352" y="1874519"/>
+            <a:ext cx="1463040" cy="38100"/>
+          </a:xfrm>
+          <a:prstGeom prst="rect">
+            <a:avLst/>
+          </a:prstGeom>
+          <a:solidFill>
+            <a:srgbClr val="BA880F"/>
+          </a:solidFill>
+          <a:ln>
+            <a:noFill/>
+          </a:ln>
+          <a:effectLst/>
+        </p:spPr>
+        <p:style>
+          <a:lnRef idx="1">
+            <a:schemeClr val="accent1"/>
+          </a:lnRef>
+          <a:fillRef idx="3">
+            <a:schemeClr val="accent1"/>
+          </a:fillRef>
+          <a:effectRef idx="2">
+            <a:schemeClr val="accent1"/>
+          </a:effectRef>
+          <a:fontRef idx="minor">
+            <a:schemeClr val="lt1"/>
+          </a:fontRef>
+        </p:style>
+        <p:txBody>
+          <a:bodyPr rtlCol="0" anchor="ctr"/>
+          <a:lstStyle/>
+          <a:p>
+            <a:pPr algn="ctr"/>
+          </a:p>
+        </p:txBody>
+      </p:sp>
+      <p:sp>
+        <p:nvSpPr>
+          <p:cNvPr id="6" name="TextBox 5"/>
+          <p:cNvSpPr txBox="1"/>
+          <p:nvPr/>
+        </p:nvSpPr>
+        <p:spPr>
+          <a:xfrm>
+            <a:off x="502920" y="2286000"/>
+            <a:ext cx="11155680" cy="3840480"/>
+          </a:xfrm>
+          <a:prstGeom prst="rect">
+            <a:avLst/>
+          </a:prstGeom>
+          <a:noFill/>
+        </p:spPr>
+        <p:txBody>
+          <a:bodyPr wrap="square">
+            <a:spAutoFit/>
+          </a:bodyPr>
+          <a:lstStyle/>
+          <a:p>
+            <a:pPr>
+              <a:spcBef>
+                <a:spcPts val="0"/>
+              </a:spcBef>
+              <a:spcAft>
+                <a:spcPts val="1400"/>
+              </a:spcAft>
+            </a:pPr>
+            <a:r>
+              <a:rPr sz="1900" b="1">
+                <a:solidFill>
+                  <a:srgbClr val="F7BD48"/>
+                </a:solidFill>
+                <a:latin typeface="JetBrains Mono"/>
+              </a:rPr>
+              <a:t>▪  </a:t>
+            </a:r>
+            <a:r>
+              <a:rPr sz="1900">
+                <a:solidFill>
+                  <a:srgbClr val="E5E2E1"/>
+                </a:solidFill>
+                <a:latin typeface="Sora"/>
+              </a:rPr>
               <a:t>Real on-chain volume: deploys, joins, payouts, refunds</a:t>
             </a:r>
           </a:p>
           <a:p>
-            <a:r>
+            <a:pPr>
+              <a:spcBef>
+                <a:spcPts val="0"/>
+              </a:spcBef>
+              <a:spcAft>
+                <a:spcPts val="1400"/>
+              </a:spcAft>
+            </a:pPr>
+            <a:r>
+              <a:rPr sz="1900" b="1">
+                <a:solidFill>
+                  <a:srgbClr val="F7BD48"/>
+                </a:solidFill>
+                <a:latin typeface="JetBrains Mono"/>
+              </a:rPr>
+              <a:t>▪  </a:t>
+            </a:r>
+            <a:r>
+              <a:rPr sz="1900">
+                <a:solidFill>
+                  <a:srgbClr val="E5E2E1"/>
+                </a:solidFill>
+                <a:latin typeface="Sora"/>
+              </a:rPr>
               <a:t>Taps USDC-on-Stellar's $4.2B+ payment rail</a:t>
             </a:r>
           </a:p>
           <a:p>
-            <a:r>
+            <a:pPr>
+              <a:spcBef>
+                <a:spcPts val="0"/>
+              </a:spcBef>
+              <a:spcAft>
+                <a:spcPts val="1400"/>
+              </a:spcAft>
+            </a:pPr>
+            <a:r>
+              <a:rPr sz="1900" b="1">
+                <a:solidFill>
+                  <a:srgbClr val="F7BD48"/>
+                </a:solidFill>
+                <a:latin typeface="JetBrains Mono"/>
+              </a:rPr>
+              <a:t>▪  </a:t>
+            </a:r>
+            <a:r>
+              <a:rPr sz="1900">
+                <a:solidFill>
+                  <a:srgbClr val="E5E2E1"/>
+                </a:solidFill>
+                <a:latin typeface="Sora"/>
+              </a:rPr>
               <a:t>Web3 gaming market: $33.4B in 2026</a:t>
             </a:r>
           </a:p>
           <a:p>
-            <a:r>
+            <a:pPr>
+              <a:spcBef>
+                <a:spcPts val="0"/>
+              </a:spcBef>
+              <a:spcAft>
+                <a:spcPts val="1400"/>
+              </a:spcAft>
+            </a:pPr>
+            <a:r>
+              <a:rPr sz="1900" b="1">
+                <a:solidFill>
+                  <a:srgbClr val="F7BD48"/>
+                </a:solidFill>
+                <a:latin typeface="JetBrains Mono"/>
+              </a:rPr>
+              <a:t>▪  </a:t>
+            </a:r>
+            <a:r>
+              <a:rPr sz="1900">
+                <a:solidFill>
+                  <a:srgbClr val="E5E2E1"/>
+                </a:solidFill>
+                <a:latin typeface="Sora"/>
+              </a:rPr>
               <a:t>Reference pattern: client-signs, server-never-holds-keys</a:t>
+            </a:r>
+          </a:p>
+        </p:txBody>
+      </p:sp>
+      <p:sp>
+        <p:nvSpPr>
+          <p:cNvPr id="7" name="TextBox 6"/>
+          <p:cNvSpPr txBox="1"/>
+          <p:nvPr/>
+        </p:nvSpPr>
+        <p:spPr>
+          <a:xfrm>
+            <a:off x="502920" y="6419088"/>
+            <a:ext cx="5486400" cy="320040"/>
+          </a:xfrm>
+          <a:prstGeom prst="rect">
+            <a:avLst/>
+          </a:prstGeom>
+          <a:noFill/>
+        </p:spPr>
+        <p:txBody>
+          <a:bodyPr wrap="square" anchor="t">
+            <a:spAutoFit/>
+          </a:bodyPr>
+          <a:lstStyle/>
+          <a:p>
+            <a:pPr algn="l">
+              <a:spcBef>
+                <a:spcPts val="0"/>
+              </a:spcBef>
+              <a:spcAft>
+                <a:spcPts val="600"/>
+              </a:spcAft>
+            </a:pPr>
+            <a:r>
+              <a:rPr sz="900" b="0" i="0">
+                <a:solidFill>
+                  <a:srgbClr val="D3C4AF"/>
+                </a:solidFill>
+                <a:latin typeface="JetBrains Mono"/>
+              </a:rPr>
+              <a:t>GOOD GAME GUILD</a:t>
+            </a:r>
+          </a:p>
+        </p:txBody>
+      </p:sp>
+      <p:sp>
+        <p:nvSpPr>
+          <p:cNvPr id="8" name="TextBox 7"/>
+          <p:cNvSpPr txBox="1"/>
+          <p:nvPr/>
+        </p:nvSpPr>
+        <p:spPr>
+          <a:xfrm>
+            <a:off x="10241280" y="6419088"/>
+            <a:ext cx="1463040" cy="320040"/>
+          </a:xfrm>
+          <a:prstGeom prst="rect">
+            <a:avLst/>
+          </a:prstGeom>
+          <a:noFill/>
+        </p:spPr>
+        <p:txBody>
+          <a:bodyPr wrap="square" anchor="t">
+            <a:spAutoFit/>
+          </a:bodyPr>
+          <a:lstStyle/>
+          <a:p>
+            <a:pPr algn="r">
+              <a:spcBef>
+                <a:spcPts val="0"/>
+              </a:spcBef>
+              <a:spcAft>
+                <a:spcPts val="600"/>
+              </a:spcAft>
+            </a:pPr>
+            <a:r>
+              <a:rPr sz="900" b="1" i="0">
+                <a:solidFill>
+                  <a:srgbClr val="F7BD48"/>
+                </a:solidFill>
+                <a:latin typeface="JetBrains Mono"/>
+              </a:rPr>
+              <a:t>SOROBAN</a:t>
+            </a:r>
+            <a:r>
+              <a:rPr sz="900" b="0" i="0">
+                <a:solidFill>
+                  <a:srgbClr val="D3C4AF"/>
+                </a:solidFill>
+                <a:latin typeface="JetBrains Mono"/>
+              </a:rPr>
+              <a:t>  ·  06</a:t>
             </a:r>
           </a:p>
         </p:txBody>
@@ -4779,6 +6994,14 @@
 <file path=ppt/slides/slide7.xml><?xml version="1.0" encoding="utf-8"?>
 <p:sld xmlns:a="http://schemas.openxmlformats.org/drawingml/2006/main" xmlns:p="http://schemas.openxmlformats.org/presentationml/2006/main" xmlns:r="http://schemas.openxmlformats.org/officeDocument/2006/relationships">
   <p:cSld>
+    <p:bg>
+      <p:bgPr>
+        <a:solidFill>
+          <a:srgbClr val="131313"/>
+        </a:solidFill>
+        <a:effectLst/>
+      </p:bgPr>
+    </p:bg>
     <p:spTree>
       <p:nvGrpSpPr>
         <p:cNvPr id="1" name=""/>
@@ -4788,62 +7011,428 @@
       <p:grpSpPr/>
       <p:sp>
         <p:nvSpPr>
-          <p:cNvPr id="2" name="Title 1"/>
-          <p:cNvSpPr>
-            <a:spLocks noGrp="1"/>
-          </p:cNvSpPr>
-          <p:nvPr>
-            <p:ph type="title"/>
-          </p:nvPr>
-        </p:nvSpPr>
-        <p:spPr/>
-        <p:txBody>
-          <a:bodyPr/>
-          <a:lstStyle/>
-          <a:p>
-            <a:r>
-              <a:t>Ecosystem Integration Roadmap</a:t>
-            </a:r>
-          </a:p>
-        </p:txBody>
-      </p:sp>
-      <p:sp>
-        <p:nvSpPr>
-          <p:cNvPr id="3" name="Content Placeholder 2"/>
-          <p:cNvSpPr>
-            <a:spLocks noGrp="1"/>
-          </p:cNvSpPr>
-          <p:nvPr>
-            <p:ph idx="1"/>
-          </p:nvPr>
-        </p:nvSpPr>
-        <p:spPr/>
-        <p:txBody>
-          <a:bodyPr wrap="square"/>
-          <a:lstStyle/>
-          <a:p>
-            <a:r>
+          <p:cNvPr id="2" name="Rectangle 1"/>
+          <p:cNvSpPr/>
+          <p:nvPr/>
+        </p:nvSpPr>
+        <p:spPr>
+          <a:xfrm>
+            <a:off x="0" y="0"/>
+            <a:ext cx="12191695" cy="63500"/>
+          </a:xfrm>
+          <a:prstGeom prst="rect">
+            <a:avLst/>
+          </a:prstGeom>
+          <a:solidFill>
+            <a:srgbClr val="F7BD48"/>
+          </a:solidFill>
+          <a:ln>
+            <a:noFill/>
+          </a:ln>
+          <a:effectLst/>
+        </p:spPr>
+        <p:style>
+          <a:lnRef idx="1">
+            <a:schemeClr val="accent1"/>
+          </a:lnRef>
+          <a:fillRef idx="3">
+            <a:schemeClr val="accent1"/>
+          </a:fillRef>
+          <a:effectRef idx="2">
+            <a:schemeClr val="accent1"/>
+          </a:effectRef>
+          <a:fontRef idx="minor">
+            <a:schemeClr val="lt1"/>
+          </a:fontRef>
+        </p:style>
+        <p:txBody>
+          <a:bodyPr rtlCol="0" anchor="ctr"/>
+          <a:lstStyle/>
+          <a:p>
+            <a:pPr algn="ctr"/>
+          </a:p>
+        </p:txBody>
+      </p:sp>
+      <p:sp>
+        <p:nvSpPr>
+          <p:cNvPr id="3" name="TextBox 2"/>
+          <p:cNvSpPr txBox="1"/>
+          <p:nvPr/>
+        </p:nvSpPr>
+        <p:spPr>
+          <a:xfrm>
+            <a:off x="502920" y="502920"/>
+            <a:ext cx="10058400" cy="365760"/>
+          </a:xfrm>
+          <a:prstGeom prst="rect">
+            <a:avLst/>
+          </a:prstGeom>
+          <a:noFill/>
+        </p:spPr>
+        <p:txBody>
+          <a:bodyPr wrap="square" anchor="t">
+            <a:spAutoFit/>
+          </a:bodyPr>
+          <a:lstStyle/>
+          <a:p>
+            <a:pPr algn="l">
+              <a:spcBef>
+                <a:spcPts val="0"/>
+              </a:spcBef>
+              <a:spcAft>
+                <a:spcPts val="600"/>
+              </a:spcAft>
+            </a:pPr>
+            <a:r>
+              <a:rPr sz="1200" b="1" i="0">
+                <a:solidFill>
+                  <a:srgbClr val="F7BD48"/>
+                </a:solidFill>
+                <a:latin typeface="JetBrains Mono"/>
+              </a:rPr>
+              <a:t>ROADMAP  //  ECOSYSTEM INTEGRATION</a:t>
+            </a:r>
+          </a:p>
+        </p:txBody>
+      </p:sp>
+      <p:sp>
+        <p:nvSpPr>
+          <p:cNvPr id="4" name="TextBox 3"/>
+          <p:cNvSpPr txBox="1"/>
+          <p:nvPr/>
+        </p:nvSpPr>
+        <p:spPr>
+          <a:xfrm>
+            <a:off x="502920" y="868680"/>
+            <a:ext cx="11155680" cy="1005840"/>
+          </a:xfrm>
+          <a:prstGeom prst="rect">
+            <a:avLst/>
+          </a:prstGeom>
+          <a:noFill/>
+        </p:spPr>
+        <p:txBody>
+          <a:bodyPr wrap="square" anchor="t">
+            <a:spAutoFit/>
+          </a:bodyPr>
+          <a:lstStyle/>
+          <a:p>
+            <a:pPr algn="l">
+              <a:spcBef>
+                <a:spcPts val="0"/>
+              </a:spcBef>
+              <a:spcAft>
+                <a:spcPts val="600"/>
+              </a:spcAft>
+            </a:pPr>
+            <a:r>
+              <a:rPr sz="2800" b="1" i="0">
+                <a:solidFill>
+                  <a:srgbClr val="F7BD48"/>
+                </a:solidFill>
+                <a:latin typeface="Sora"/>
+              </a:rPr>
+              <a:t>Plug into Stellar's rails, don't rebuild them</a:t>
+            </a:r>
+          </a:p>
+        </p:txBody>
+      </p:sp>
+      <p:sp>
+        <p:nvSpPr>
+          <p:cNvPr id="5" name="Rectangle 4"/>
+          <p:cNvSpPr/>
+          <p:nvPr/>
+        </p:nvSpPr>
+        <p:spPr>
+          <a:xfrm>
+            <a:off x="530352" y="1874519"/>
+            <a:ext cx="1463040" cy="38100"/>
+          </a:xfrm>
+          <a:prstGeom prst="rect">
+            <a:avLst/>
+          </a:prstGeom>
+          <a:solidFill>
+            <a:srgbClr val="BA880F"/>
+          </a:solidFill>
+          <a:ln>
+            <a:noFill/>
+          </a:ln>
+          <a:effectLst/>
+        </p:spPr>
+        <p:style>
+          <a:lnRef idx="1">
+            <a:schemeClr val="accent1"/>
+          </a:lnRef>
+          <a:fillRef idx="3">
+            <a:schemeClr val="accent1"/>
+          </a:fillRef>
+          <a:effectRef idx="2">
+            <a:schemeClr val="accent1"/>
+          </a:effectRef>
+          <a:fontRef idx="minor">
+            <a:schemeClr val="lt1"/>
+          </a:fontRef>
+        </p:style>
+        <p:txBody>
+          <a:bodyPr rtlCol="0" anchor="ctr"/>
+          <a:lstStyle/>
+          <a:p>
+            <a:pPr algn="ctr"/>
+          </a:p>
+        </p:txBody>
+      </p:sp>
+      <p:sp>
+        <p:nvSpPr>
+          <p:cNvPr id="6" name="TextBox 5"/>
+          <p:cNvSpPr txBox="1"/>
+          <p:nvPr/>
+        </p:nvSpPr>
+        <p:spPr>
+          <a:xfrm>
+            <a:off x="502920" y="2286000"/>
+            <a:ext cx="11155680" cy="3840480"/>
+          </a:xfrm>
+          <a:prstGeom prst="rect">
+            <a:avLst/>
+          </a:prstGeom>
+          <a:noFill/>
+        </p:spPr>
+        <p:txBody>
+          <a:bodyPr wrap="square">
+            <a:spAutoFit/>
+          </a:bodyPr>
+          <a:lstStyle/>
+          <a:p>
+            <a:pPr>
+              <a:spcBef>
+                <a:spcPts val="0"/>
+              </a:spcBef>
+              <a:spcAft>
+                <a:spcPts val="1400"/>
+              </a:spcAft>
+            </a:pPr>
+            <a:r>
+              <a:rPr sz="1900" b="1">
+                <a:solidFill>
+                  <a:srgbClr val="F7BD48"/>
+                </a:solidFill>
+                <a:latin typeface="JetBrains Mono"/>
+              </a:rPr>
+              <a:t>▪  </a:t>
+            </a:r>
+            <a:r>
+              <a:rPr sz="1900">
+                <a:solidFill>
+                  <a:srgbClr val="E5E2E1"/>
+                </a:solidFill>
+                <a:latin typeface="Sora"/>
+              </a:rPr>
               <a:t>SEP-24 / SEP-31: fiat on-ramp + cross-border payout</a:t>
             </a:r>
           </a:p>
           <a:p>
-            <a:r>
+            <a:pPr>
+              <a:spcBef>
+                <a:spcPts val="0"/>
+              </a:spcBef>
+              <a:spcAft>
+                <a:spcPts val="1400"/>
+              </a:spcAft>
+            </a:pPr>
+            <a:r>
+              <a:rPr sz="1900" b="1">
+                <a:solidFill>
+                  <a:srgbClr val="F7BD48"/>
+                </a:solidFill>
+                <a:latin typeface="JetBrains Mono"/>
+              </a:rPr>
+              <a:t>▪  </a:t>
+            </a:r>
+            <a:r>
+              <a:rPr sz="1900">
+                <a:solidFill>
+                  <a:srgbClr val="E5E2E1"/>
+                </a:solidFill>
+                <a:latin typeface="Sora"/>
+              </a:rPr>
               <a:t>SEP-45 passkeys: wallet-less player onboarding</a:t>
             </a:r>
           </a:p>
           <a:p>
-            <a:r>
+            <a:pPr>
+              <a:spcBef>
+                <a:spcPts val="0"/>
+              </a:spcBef>
+              <a:spcAft>
+                <a:spcPts val="1400"/>
+              </a:spcAft>
+            </a:pPr>
+            <a:r>
+              <a:rPr sz="1900" b="1">
+                <a:solidFill>
+                  <a:srgbClr val="F7BD48"/>
+                </a:solidFill>
+                <a:latin typeface="JetBrains Mono"/>
+              </a:rPr>
+              <a:t>▪  </a:t>
+            </a:r>
+            <a:r>
+              <a:rPr sz="1900">
+                <a:solidFill>
+                  <a:srgbClr val="E5E2E1"/>
+                </a:solidFill>
+                <a:latin typeface="Sora"/>
+              </a:rPr>
               <a:t>SEP-50 NFTs: on-chain tournament trophies</a:t>
             </a:r>
           </a:p>
           <a:p>
-            <a:r>
+            <a:pPr>
+              <a:spcBef>
+                <a:spcPts val="0"/>
+              </a:spcBef>
+              <a:spcAft>
+                <a:spcPts val="1400"/>
+              </a:spcAft>
+            </a:pPr>
+            <a:r>
+              <a:rPr sz="1900" b="1">
+                <a:solidFill>
+                  <a:srgbClr val="F7BD48"/>
+                </a:solidFill>
+                <a:latin typeface="JetBrains Mono"/>
+              </a:rPr>
+              <a:t>▪  </a:t>
+            </a:r>
+            <a:r>
+              <a:rPr sz="1900">
+                <a:solidFill>
+                  <a:srgbClr val="E5E2E1"/>
+                </a:solidFill>
+                <a:latin typeface="Sora"/>
+              </a:rPr>
               <a:t>Soroswap + Reflector: any-asset, USD-pegged entry</a:t>
             </a:r>
           </a:p>
           <a:p>
-            <a:r>
+            <a:pPr>
+              <a:spcBef>
+                <a:spcPts val="0"/>
+              </a:spcBef>
+              <a:spcAft>
+                <a:spcPts val="1400"/>
+              </a:spcAft>
+            </a:pPr>
+            <a:r>
+              <a:rPr sz="1900" b="1">
+                <a:solidFill>
+                  <a:srgbClr val="F7BD48"/>
+                </a:solidFill>
+                <a:latin typeface="JetBrains Mono"/>
+              </a:rPr>
+              <a:t>▪  </a:t>
+            </a:r>
+            <a:r>
+              <a:rPr sz="1900">
+                <a:solidFill>
+                  <a:srgbClr val="E5E2E1"/>
+                </a:solidFill>
+                <a:latin typeface="Sora"/>
+              </a:rPr>
               <a:t>MoneyGram Ramps / MGUSD: cash-to-crypto, 170+ countries</a:t>
+            </a:r>
+          </a:p>
+        </p:txBody>
+      </p:sp>
+      <p:sp>
+        <p:nvSpPr>
+          <p:cNvPr id="7" name="TextBox 6"/>
+          <p:cNvSpPr txBox="1"/>
+          <p:nvPr/>
+        </p:nvSpPr>
+        <p:spPr>
+          <a:xfrm>
+            <a:off x="502920" y="6419088"/>
+            <a:ext cx="5486400" cy="320040"/>
+          </a:xfrm>
+          <a:prstGeom prst="rect">
+            <a:avLst/>
+          </a:prstGeom>
+          <a:noFill/>
+        </p:spPr>
+        <p:txBody>
+          <a:bodyPr wrap="square" anchor="t">
+            <a:spAutoFit/>
+          </a:bodyPr>
+          <a:lstStyle/>
+          <a:p>
+            <a:pPr algn="l">
+              <a:spcBef>
+                <a:spcPts val="0"/>
+              </a:spcBef>
+              <a:spcAft>
+                <a:spcPts val="600"/>
+              </a:spcAft>
+            </a:pPr>
+            <a:r>
+              <a:rPr sz="900" b="0" i="0">
+                <a:solidFill>
+                  <a:srgbClr val="D3C4AF"/>
+                </a:solidFill>
+                <a:latin typeface="JetBrains Mono"/>
+              </a:rPr>
+              <a:t>GOOD GAME GUILD</a:t>
+            </a:r>
+          </a:p>
+        </p:txBody>
+      </p:sp>
+      <p:sp>
+        <p:nvSpPr>
+          <p:cNvPr id="8" name="TextBox 7"/>
+          <p:cNvSpPr txBox="1"/>
+          <p:nvPr/>
+        </p:nvSpPr>
+        <p:spPr>
+          <a:xfrm>
+            <a:off x="10241280" y="6419088"/>
+            <a:ext cx="1463040" cy="320040"/>
+          </a:xfrm>
+          <a:prstGeom prst="rect">
+            <a:avLst/>
+          </a:prstGeom>
+          <a:noFill/>
+        </p:spPr>
+        <p:txBody>
+          <a:bodyPr wrap="square" anchor="t">
+            <a:spAutoFit/>
+          </a:bodyPr>
+          <a:lstStyle/>
+          <a:p>
+            <a:pPr algn="r">
+              <a:spcBef>
+                <a:spcPts val="0"/>
+              </a:spcBef>
+              <a:spcAft>
+                <a:spcPts val="600"/>
+              </a:spcAft>
+            </a:pPr>
+            <a:r>
+              <a:rPr sz="900" b="1" i="0">
+                <a:solidFill>
+                  <a:srgbClr val="F7BD48"/>
+                </a:solidFill>
+                <a:latin typeface="JetBrains Mono"/>
+              </a:rPr>
+              <a:t>SOROBAN</a:t>
+            </a:r>
+            <a:r>
+              <a:rPr sz="900" b="0" i="0">
+                <a:solidFill>
+                  <a:srgbClr val="D3C4AF"/>
+                </a:solidFill>
+                <a:latin typeface="JetBrains Mono"/>
+              </a:rPr>
+              <a:t>  ·  07</a:t>
             </a:r>
           </a:p>
         </p:txBody>
@@ -4859,6 +7448,14 @@
 <file path=ppt/slides/slide8.xml><?xml version="1.0" encoding="utf-8"?>
 <p:sld xmlns:a="http://schemas.openxmlformats.org/drawingml/2006/main" xmlns:p="http://schemas.openxmlformats.org/presentationml/2006/main" xmlns:r="http://schemas.openxmlformats.org/officeDocument/2006/relationships">
   <p:cSld>
+    <p:bg>
+      <p:bgPr>
+        <a:solidFill>
+          <a:srgbClr val="131313"/>
+        </a:solidFill>
+        <a:effectLst/>
+      </p:bgPr>
+    </p:bg>
     <p:spTree>
       <p:nvGrpSpPr>
         <p:cNvPr id="1" name=""/>
@@ -4868,52 +7465,372 @@
       <p:grpSpPr/>
       <p:sp>
         <p:nvSpPr>
-          <p:cNvPr id="2" name="Title 1"/>
-          <p:cNvSpPr>
-            <a:spLocks noGrp="1"/>
-          </p:cNvSpPr>
-          <p:nvPr>
-            <p:ph type="title"/>
-          </p:nvPr>
-        </p:nvSpPr>
-        <p:spPr/>
-        <p:txBody>
-          <a:bodyPr/>
-          <a:lstStyle/>
-          <a:p>
-            <a:r>
-              <a:t>Go-to-Market: Philippines -&gt; APAC -&gt; Global</a:t>
-            </a:r>
-          </a:p>
-        </p:txBody>
-      </p:sp>
-      <p:sp>
-        <p:nvSpPr>
-          <p:cNvPr id="3" name="Content Placeholder 2"/>
-          <p:cNvSpPr>
-            <a:spLocks noGrp="1"/>
-          </p:cNvSpPr>
-          <p:nvPr>
-            <p:ph idx="1"/>
-          </p:nvPr>
-        </p:nvSpPr>
-        <p:spPr/>
-        <p:txBody>
-          <a:bodyPr wrap="square"/>
-          <a:lstStyle/>
-          <a:p>
-            <a:r>
+          <p:cNvPr id="2" name="Rectangle 1"/>
+          <p:cNvSpPr/>
+          <p:nvPr/>
+        </p:nvSpPr>
+        <p:spPr>
+          <a:xfrm>
+            <a:off x="0" y="0"/>
+            <a:ext cx="12191695" cy="63500"/>
+          </a:xfrm>
+          <a:prstGeom prst="rect">
+            <a:avLst/>
+          </a:prstGeom>
+          <a:solidFill>
+            <a:srgbClr val="F7BD48"/>
+          </a:solidFill>
+          <a:ln>
+            <a:noFill/>
+          </a:ln>
+          <a:effectLst/>
+        </p:spPr>
+        <p:style>
+          <a:lnRef idx="1">
+            <a:schemeClr val="accent1"/>
+          </a:lnRef>
+          <a:fillRef idx="3">
+            <a:schemeClr val="accent1"/>
+          </a:fillRef>
+          <a:effectRef idx="2">
+            <a:schemeClr val="accent1"/>
+          </a:effectRef>
+          <a:fontRef idx="minor">
+            <a:schemeClr val="lt1"/>
+          </a:fontRef>
+        </p:style>
+        <p:txBody>
+          <a:bodyPr rtlCol="0" anchor="ctr"/>
+          <a:lstStyle/>
+          <a:p>
+            <a:pPr algn="ctr"/>
+          </a:p>
+        </p:txBody>
+      </p:sp>
+      <p:sp>
+        <p:nvSpPr>
+          <p:cNvPr id="3" name="TextBox 2"/>
+          <p:cNvSpPr txBox="1"/>
+          <p:nvPr/>
+        </p:nvSpPr>
+        <p:spPr>
+          <a:xfrm>
+            <a:off x="502920" y="502920"/>
+            <a:ext cx="10058400" cy="365760"/>
+          </a:xfrm>
+          <a:prstGeom prst="rect">
+            <a:avLst/>
+          </a:prstGeom>
+          <a:noFill/>
+        </p:spPr>
+        <p:txBody>
+          <a:bodyPr wrap="square" anchor="t">
+            <a:spAutoFit/>
+          </a:bodyPr>
+          <a:lstStyle/>
+          <a:p>
+            <a:pPr algn="l">
+              <a:spcBef>
+                <a:spcPts val="0"/>
+              </a:spcBef>
+              <a:spcAft>
+                <a:spcPts val="600"/>
+              </a:spcAft>
+            </a:pPr>
+            <a:r>
+              <a:rPr sz="1200" b="1" i="0">
+                <a:solidFill>
+                  <a:srgbClr val="F7BD48"/>
+                </a:solidFill>
+                <a:latin typeface="JetBrains Mono"/>
+              </a:rPr>
+              <a:t>GO-TO-MARKET</a:t>
+            </a:r>
+          </a:p>
+        </p:txBody>
+      </p:sp>
+      <p:sp>
+        <p:nvSpPr>
+          <p:cNvPr id="4" name="TextBox 3"/>
+          <p:cNvSpPr txBox="1"/>
+          <p:nvPr/>
+        </p:nvSpPr>
+        <p:spPr>
+          <a:xfrm>
+            <a:off x="502920" y="868680"/>
+            <a:ext cx="11155680" cy="1005840"/>
+          </a:xfrm>
+          <a:prstGeom prst="rect">
+            <a:avLst/>
+          </a:prstGeom>
+          <a:noFill/>
+        </p:spPr>
+        <p:txBody>
+          <a:bodyPr wrap="square" anchor="t">
+            <a:spAutoFit/>
+          </a:bodyPr>
+          <a:lstStyle/>
+          <a:p>
+            <a:pPr algn="l">
+              <a:spcBef>
+                <a:spcPts val="0"/>
+              </a:spcBef>
+              <a:spcAft>
+                <a:spcPts val="600"/>
+              </a:spcAft>
+            </a:pPr>
+            <a:r>
+              <a:rPr sz="3000" b="1" i="0">
+                <a:solidFill>
+                  <a:srgbClr val="F7BD48"/>
+                </a:solidFill>
+                <a:latin typeface="Sora"/>
+              </a:rPr>
+              <a:t>Philippines → APAC → Global</a:t>
+            </a:r>
+          </a:p>
+        </p:txBody>
+      </p:sp>
+      <p:sp>
+        <p:nvSpPr>
+          <p:cNvPr id="5" name="Rectangle 4"/>
+          <p:cNvSpPr/>
+          <p:nvPr/>
+        </p:nvSpPr>
+        <p:spPr>
+          <a:xfrm>
+            <a:off x="530352" y="1874519"/>
+            <a:ext cx="1463040" cy="38100"/>
+          </a:xfrm>
+          <a:prstGeom prst="rect">
+            <a:avLst/>
+          </a:prstGeom>
+          <a:solidFill>
+            <a:srgbClr val="BA880F"/>
+          </a:solidFill>
+          <a:ln>
+            <a:noFill/>
+          </a:ln>
+          <a:effectLst/>
+        </p:spPr>
+        <p:style>
+          <a:lnRef idx="1">
+            <a:schemeClr val="accent1"/>
+          </a:lnRef>
+          <a:fillRef idx="3">
+            <a:schemeClr val="accent1"/>
+          </a:fillRef>
+          <a:effectRef idx="2">
+            <a:schemeClr val="accent1"/>
+          </a:effectRef>
+          <a:fontRef idx="minor">
+            <a:schemeClr val="lt1"/>
+          </a:fontRef>
+        </p:style>
+        <p:txBody>
+          <a:bodyPr rtlCol="0" anchor="ctr"/>
+          <a:lstStyle/>
+          <a:p>
+            <a:pPr algn="ctr"/>
+          </a:p>
+        </p:txBody>
+      </p:sp>
+      <p:sp>
+        <p:nvSpPr>
+          <p:cNvPr id="6" name="TextBox 5"/>
+          <p:cNvSpPr txBox="1"/>
+          <p:nvPr/>
+        </p:nvSpPr>
+        <p:spPr>
+          <a:xfrm>
+            <a:off x="502920" y="2286000"/>
+            <a:ext cx="11155680" cy="3840480"/>
+          </a:xfrm>
+          <a:prstGeom prst="rect">
+            <a:avLst/>
+          </a:prstGeom>
+          <a:noFill/>
+        </p:spPr>
+        <p:txBody>
+          <a:bodyPr wrap="square">
+            <a:spAutoFit/>
+          </a:bodyPr>
+          <a:lstStyle/>
+          <a:p>
+            <a:pPr>
+              <a:spcBef>
+                <a:spcPts val="0"/>
+              </a:spcBef>
+              <a:spcAft>
+                <a:spcPts val="1400"/>
+              </a:spcAft>
+            </a:pPr>
+            <a:r>
+              <a:rPr sz="1900" b="1">
+                <a:solidFill>
+                  <a:srgbClr val="F7BD48"/>
+                </a:solidFill>
+                <a:latin typeface="JetBrains Mono"/>
+              </a:rPr>
+              <a:t>▪  </a:t>
+            </a:r>
+            <a:r>
+              <a:rPr sz="1900">
+                <a:solidFill>
+                  <a:srgbClr val="E5E2E1"/>
+                </a:solidFill>
+                <a:latin typeface="Sora"/>
+              </a:rPr>
               <a:t>Philippines: grassroots esports + remittance/USDC fluency</a:t>
             </a:r>
           </a:p>
           <a:p>
-            <a:r>
+            <a:pPr>
+              <a:spcBef>
+                <a:spcPts val="0"/>
+              </a:spcBef>
+              <a:spcAft>
+                <a:spcPts val="1400"/>
+              </a:spcAft>
+            </a:pPr>
+            <a:r>
+              <a:rPr sz="1900" b="1">
+                <a:solidFill>
+                  <a:srgbClr val="F7BD48"/>
+                </a:solidFill>
+                <a:latin typeface="JetBrains Mono"/>
+              </a:rPr>
+              <a:t>▪  </a:t>
+            </a:r>
+            <a:r>
+              <a:rPr sz="1900">
+                <a:solidFill>
+                  <a:srgbClr val="E5E2E1"/>
+                </a:solidFill>
+                <a:latin typeface="Sora"/>
+              </a:rPr>
               <a:t>APAC: guild &amp; LAN culture (Vietnam, Indonesia, Korea)</a:t>
             </a:r>
           </a:p>
           <a:p>
-            <a:r>
+            <a:pPr>
+              <a:spcBef>
+                <a:spcPts val="0"/>
+              </a:spcBef>
+              <a:spcAft>
+                <a:spcPts val="1400"/>
+              </a:spcAft>
+            </a:pPr>
+            <a:r>
+              <a:rPr sz="1900" b="1">
+                <a:solidFill>
+                  <a:srgbClr val="F7BD48"/>
+                </a:solidFill>
+                <a:latin typeface="JetBrains Mono"/>
+              </a:rPr>
+              <a:t>▪  </a:t>
+            </a:r>
+            <a:r>
+              <a:rPr sz="1900">
+                <a:solidFill>
+                  <a:srgbClr val="E5E2E1"/>
+                </a:solidFill>
+                <a:latin typeface="Sora"/>
+              </a:rPr>
               <a:t>Global: any game, any Stellar wallet, SCF-backed growth</a:t>
+            </a:r>
+          </a:p>
+        </p:txBody>
+      </p:sp>
+      <p:sp>
+        <p:nvSpPr>
+          <p:cNvPr id="7" name="TextBox 6"/>
+          <p:cNvSpPr txBox="1"/>
+          <p:nvPr/>
+        </p:nvSpPr>
+        <p:spPr>
+          <a:xfrm>
+            <a:off x="502920" y="6419088"/>
+            <a:ext cx="5486400" cy="320040"/>
+          </a:xfrm>
+          <a:prstGeom prst="rect">
+            <a:avLst/>
+          </a:prstGeom>
+          <a:noFill/>
+        </p:spPr>
+        <p:txBody>
+          <a:bodyPr wrap="square" anchor="t">
+            <a:spAutoFit/>
+          </a:bodyPr>
+          <a:lstStyle/>
+          <a:p>
+            <a:pPr algn="l">
+              <a:spcBef>
+                <a:spcPts val="0"/>
+              </a:spcBef>
+              <a:spcAft>
+                <a:spcPts val="600"/>
+              </a:spcAft>
+            </a:pPr>
+            <a:r>
+              <a:rPr sz="900" b="0" i="0">
+                <a:solidFill>
+                  <a:srgbClr val="D3C4AF"/>
+                </a:solidFill>
+                <a:latin typeface="JetBrains Mono"/>
+              </a:rPr>
+              <a:t>GOOD GAME GUILD</a:t>
+            </a:r>
+          </a:p>
+        </p:txBody>
+      </p:sp>
+      <p:sp>
+        <p:nvSpPr>
+          <p:cNvPr id="8" name="TextBox 7"/>
+          <p:cNvSpPr txBox="1"/>
+          <p:nvPr/>
+        </p:nvSpPr>
+        <p:spPr>
+          <a:xfrm>
+            <a:off x="10241280" y="6419088"/>
+            <a:ext cx="1463040" cy="320040"/>
+          </a:xfrm>
+          <a:prstGeom prst="rect">
+            <a:avLst/>
+          </a:prstGeom>
+          <a:noFill/>
+        </p:spPr>
+        <p:txBody>
+          <a:bodyPr wrap="square" anchor="t">
+            <a:spAutoFit/>
+          </a:bodyPr>
+          <a:lstStyle/>
+          <a:p>
+            <a:pPr algn="r">
+              <a:spcBef>
+                <a:spcPts val="0"/>
+              </a:spcBef>
+              <a:spcAft>
+                <a:spcPts val="600"/>
+              </a:spcAft>
+            </a:pPr>
+            <a:r>
+              <a:rPr sz="900" b="1" i="0">
+                <a:solidFill>
+                  <a:srgbClr val="F7BD48"/>
+                </a:solidFill>
+                <a:latin typeface="JetBrains Mono"/>
+              </a:rPr>
+              <a:t>SOROBAN</a:t>
+            </a:r>
+            <a:r>
+              <a:rPr sz="900" b="0" i="0">
+                <a:solidFill>
+                  <a:srgbClr val="D3C4AF"/>
+                </a:solidFill>
+                <a:latin typeface="JetBrains Mono"/>
+              </a:rPr>
+              <a:t>  ·  08</a:t>
             </a:r>
           </a:p>
         </p:txBody>
@@ -4929,6 +7846,14 @@
 <file path=ppt/slides/slide9.xml><?xml version="1.0" encoding="utf-8"?>
 <p:sld xmlns:a="http://schemas.openxmlformats.org/drawingml/2006/main" xmlns:p="http://schemas.openxmlformats.org/presentationml/2006/main" xmlns:r="http://schemas.openxmlformats.org/officeDocument/2006/relationships">
   <p:cSld>
+    <p:bg>
+      <p:bgPr>
+        <a:solidFill>
+          <a:srgbClr val="131313"/>
+        </a:solidFill>
+        <a:effectLst/>
+      </p:bgPr>
+    </p:bg>
     <p:spTree>
       <p:nvGrpSpPr>
         <p:cNvPr id="1" name=""/>
@@ -4938,57 +7863,400 @@
       <p:grpSpPr/>
       <p:sp>
         <p:nvSpPr>
-          <p:cNvPr id="2" name="Title 1"/>
-          <p:cNvSpPr>
-            <a:spLocks noGrp="1"/>
-          </p:cNvSpPr>
-          <p:nvPr>
-            <p:ph type="title"/>
-          </p:nvPr>
-        </p:nvSpPr>
-        <p:spPr/>
-        <p:txBody>
-          <a:bodyPr/>
-          <a:lstStyle/>
-          <a:p>
-            <a:r>
-              <a:t>What's next</a:t>
-            </a:r>
-          </a:p>
-        </p:txBody>
-      </p:sp>
-      <p:sp>
-        <p:nvSpPr>
-          <p:cNvPr id="3" name="Content Placeholder 2"/>
-          <p:cNvSpPr>
-            <a:spLocks noGrp="1"/>
-          </p:cNvSpPr>
-          <p:nvPr>
-            <p:ph idx="1"/>
-          </p:nvPr>
-        </p:nvSpPr>
-        <p:spPr/>
-        <p:txBody>
-          <a:bodyPr wrap="square"/>
-          <a:lstStyle/>
-          <a:p>
-            <a:r>
+          <p:cNvPr id="2" name="Rectangle 1"/>
+          <p:cNvSpPr/>
+          <p:nvPr/>
+        </p:nvSpPr>
+        <p:spPr>
+          <a:xfrm>
+            <a:off x="0" y="0"/>
+            <a:ext cx="12191695" cy="63500"/>
+          </a:xfrm>
+          <a:prstGeom prst="rect">
+            <a:avLst/>
+          </a:prstGeom>
+          <a:solidFill>
+            <a:srgbClr val="F7BD48"/>
+          </a:solidFill>
+          <a:ln>
+            <a:noFill/>
+          </a:ln>
+          <a:effectLst/>
+        </p:spPr>
+        <p:style>
+          <a:lnRef idx="1">
+            <a:schemeClr val="accent1"/>
+          </a:lnRef>
+          <a:fillRef idx="3">
+            <a:schemeClr val="accent1"/>
+          </a:fillRef>
+          <a:effectRef idx="2">
+            <a:schemeClr val="accent1"/>
+          </a:effectRef>
+          <a:fontRef idx="minor">
+            <a:schemeClr val="lt1"/>
+          </a:fontRef>
+        </p:style>
+        <p:txBody>
+          <a:bodyPr rtlCol="0" anchor="ctr"/>
+          <a:lstStyle/>
+          <a:p>
+            <a:pPr algn="ctr"/>
+          </a:p>
+        </p:txBody>
+      </p:sp>
+      <p:sp>
+        <p:nvSpPr>
+          <p:cNvPr id="3" name="TextBox 2"/>
+          <p:cNvSpPr txBox="1"/>
+          <p:nvPr/>
+        </p:nvSpPr>
+        <p:spPr>
+          <a:xfrm>
+            <a:off x="502920" y="502920"/>
+            <a:ext cx="10058400" cy="365760"/>
+          </a:xfrm>
+          <a:prstGeom prst="rect">
+            <a:avLst/>
+          </a:prstGeom>
+          <a:noFill/>
+        </p:spPr>
+        <p:txBody>
+          <a:bodyPr wrap="square" anchor="t">
+            <a:spAutoFit/>
+          </a:bodyPr>
+          <a:lstStyle/>
+          <a:p>
+            <a:pPr algn="l">
+              <a:spcBef>
+                <a:spcPts val="0"/>
+              </a:spcBef>
+              <a:spcAft>
+                <a:spcPts val="600"/>
+              </a:spcAft>
+            </a:pPr>
+            <a:r>
+              <a:rPr sz="1200" b="1" i="0">
+                <a:solidFill>
+                  <a:srgbClr val="F7BD48"/>
+                </a:solidFill>
+                <a:latin typeface="JetBrains Mono"/>
+              </a:rPr>
+              <a:t>WHAT'S NEXT</a:t>
+            </a:r>
+          </a:p>
+        </p:txBody>
+      </p:sp>
+      <p:sp>
+        <p:nvSpPr>
+          <p:cNvPr id="4" name="TextBox 3"/>
+          <p:cNvSpPr txBox="1"/>
+          <p:nvPr/>
+        </p:nvSpPr>
+        <p:spPr>
+          <a:xfrm>
+            <a:off x="502920" y="868680"/>
+            <a:ext cx="11155680" cy="1005840"/>
+          </a:xfrm>
+          <a:prstGeom prst="rect">
+            <a:avLst/>
+          </a:prstGeom>
+          <a:noFill/>
+        </p:spPr>
+        <p:txBody>
+          <a:bodyPr wrap="square" anchor="t">
+            <a:spAutoFit/>
+          </a:bodyPr>
+          <a:lstStyle/>
+          <a:p>
+            <a:pPr algn="l">
+              <a:spcBef>
+                <a:spcPts val="0"/>
+              </a:spcBef>
+              <a:spcAft>
+                <a:spcPts val="600"/>
+              </a:spcAft>
+            </a:pPr>
+            <a:r>
+              <a:rPr sz="3000" b="1" i="0">
+                <a:solidFill>
+                  <a:srgbClr val="F7BD48"/>
+                </a:solidFill>
+                <a:latin typeface="Sora"/>
+              </a:rPr>
+              <a:t>From code-complete to live business</a:t>
+            </a:r>
+          </a:p>
+        </p:txBody>
+      </p:sp>
+      <p:sp>
+        <p:nvSpPr>
+          <p:cNvPr id="5" name="Rectangle 4"/>
+          <p:cNvSpPr/>
+          <p:nvPr/>
+        </p:nvSpPr>
+        <p:spPr>
+          <a:xfrm>
+            <a:off x="530352" y="1874519"/>
+            <a:ext cx="1463040" cy="38100"/>
+          </a:xfrm>
+          <a:prstGeom prst="rect">
+            <a:avLst/>
+          </a:prstGeom>
+          <a:solidFill>
+            <a:srgbClr val="BA880F"/>
+          </a:solidFill>
+          <a:ln>
+            <a:noFill/>
+          </a:ln>
+          <a:effectLst/>
+        </p:spPr>
+        <p:style>
+          <a:lnRef idx="1">
+            <a:schemeClr val="accent1"/>
+          </a:lnRef>
+          <a:fillRef idx="3">
+            <a:schemeClr val="accent1"/>
+          </a:fillRef>
+          <a:effectRef idx="2">
+            <a:schemeClr val="accent1"/>
+          </a:effectRef>
+          <a:fontRef idx="minor">
+            <a:schemeClr val="lt1"/>
+          </a:fontRef>
+        </p:style>
+        <p:txBody>
+          <a:bodyPr rtlCol="0" anchor="ctr"/>
+          <a:lstStyle/>
+          <a:p>
+            <a:pPr algn="ctr"/>
+          </a:p>
+        </p:txBody>
+      </p:sp>
+      <p:sp>
+        <p:nvSpPr>
+          <p:cNvPr id="6" name="TextBox 5"/>
+          <p:cNvSpPr txBox="1"/>
+          <p:nvPr/>
+        </p:nvSpPr>
+        <p:spPr>
+          <a:xfrm>
+            <a:off x="502920" y="2286000"/>
+            <a:ext cx="11155680" cy="3840480"/>
+          </a:xfrm>
+          <a:prstGeom prst="rect">
+            <a:avLst/>
+          </a:prstGeom>
+          <a:noFill/>
+        </p:spPr>
+        <p:txBody>
+          <a:bodyPr wrap="square">
+            <a:spAutoFit/>
+          </a:bodyPr>
+          <a:lstStyle/>
+          <a:p>
+            <a:pPr>
+              <a:spcBef>
+                <a:spcPts val="0"/>
+              </a:spcBef>
+              <a:spcAft>
+                <a:spcPts val="1400"/>
+              </a:spcAft>
+            </a:pPr>
+            <a:r>
+              <a:rPr sz="1900" b="1">
+                <a:solidFill>
+                  <a:srgbClr val="F7BD48"/>
+                </a:solidFill>
+                <a:latin typeface="JetBrains Mono"/>
+              </a:rPr>
+              <a:t>▪  </a:t>
+            </a:r>
+            <a:r>
+              <a:rPr sz="1900">
+                <a:solidFill>
+                  <a:srgbClr val="E5E2E1"/>
+                </a:solidFill>
+                <a:latin typeface="Sora"/>
+              </a:rPr>
               <a:t>Ship the live deploy (Testnet URL)</a:t>
             </a:r>
           </a:p>
           <a:p>
-            <a:r>
-              <a:t>Add a protocol fee - turn on the business model</a:t>
-            </a:r>
-          </a:p>
-          <a:p>
-            <a:r>
+            <a:pPr>
+              <a:spcBef>
+                <a:spcPts val="0"/>
+              </a:spcBef>
+              <a:spcAft>
+                <a:spcPts val="1400"/>
+              </a:spcAft>
+            </a:pPr>
+            <a:r>
+              <a:rPr sz="1900" b="1">
+                <a:solidFill>
+                  <a:srgbClr val="F7BD48"/>
+                </a:solidFill>
+                <a:latin typeface="JetBrains Mono"/>
+              </a:rPr>
+              <a:t>▪  </a:t>
+            </a:r>
+            <a:r>
+              <a:rPr sz="1900">
+                <a:solidFill>
+                  <a:srgbClr val="E5E2E1"/>
+                </a:solidFill>
+                <a:latin typeface="Sora"/>
+              </a:rPr>
+              <a:t>Add a protocol fee — turn on the business model</a:t>
+            </a:r>
+          </a:p>
+          <a:p>
+            <a:pPr>
+              <a:spcBef>
+                <a:spcPts val="0"/>
+              </a:spcBef>
+              <a:spcAft>
+                <a:spcPts val="1400"/>
+              </a:spcAft>
+            </a:pPr>
+            <a:r>
+              <a:rPr sz="1900" b="1">
+                <a:solidFill>
+                  <a:srgbClr val="F7BD48"/>
+                </a:solidFill>
+                <a:latin typeface="JetBrains Mono"/>
+              </a:rPr>
+              <a:t>▪  </a:t>
+            </a:r>
+            <a:r>
+              <a:rPr sz="1900">
+                <a:solidFill>
+                  <a:srgbClr val="E5E2E1"/>
+                </a:solidFill>
+                <a:latin typeface="Sora"/>
+              </a:rPr>
               <a:t>Passkey onboarding + fiat ramps (see roadmap issue)</a:t>
             </a:r>
           </a:p>
           <a:p>
-            <a:r>
+            <a:pPr>
+              <a:spcBef>
+                <a:spcPts val="0"/>
+              </a:spcBef>
+              <a:spcAft>
+                <a:spcPts val="1400"/>
+              </a:spcAft>
+            </a:pPr>
+            <a:r>
+              <a:rPr sz="1900" b="1">
+                <a:solidFill>
+                  <a:srgbClr val="F7BD48"/>
+                </a:solidFill>
+                <a:latin typeface="JetBrains Mono"/>
+              </a:rPr>
+              <a:t>▪  </a:t>
+            </a:r>
+            <a:r>
+              <a:rPr sz="1900">
+                <a:solidFill>
+                  <a:srgbClr val="E5E2E1"/>
+                </a:solidFill>
+                <a:latin typeface="Sora"/>
+              </a:rPr>
               <a:t>Automated match verification (game APIs)</a:t>
+            </a:r>
+          </a:p>
+        </p:txBody>
+      </p:sp>
+      <p:sp>
+        <p:nvSpPr>
+          <p:cNvPr id="7" name="TextBox 6"/>
+          <p:cNvSpPr txBox="1"/>
+          <p:nvPr/>
+        </p:nvSpPr>
+        <p:spPr>
+          <a:xfrm>
+            <a:off x="502920" y="6419088"/>
+            <a:ext cx="5486400" cy="320040"/>
+          </a:xfrm>
+          <a:prstGeom prst="rect">
+            <a:avLst/>
+          </a:prstGeom>
+          <a:noFill/>
+        </p:spPr>
+        <p:txBody>
+          <a:bodyPr wrap="square" anchor="t">
+            <a:spAutoFit/>
+          </a:bodyPr>
+          <a:lstStyle/>
+          <a:p>
+            <a:pPr algn="l">
+              <a:spcBef>
+                <a:spcPts val="0"/>
+              </a:spcBef>
+              <a:spcAft>
+                <a:spcPts val="600"/>
+              </a:spcAft>
+            </a:pPr>
+            <a:r>
+              <a:rPr sz="900" b="0" i="0">
+                <a:solidFill>
+                  <a:srgbClr val="D3C4AF"/>
+                </a:solidFill>
+                <a:latin typeface="JetBrains Mono"/>
+              </a:rPr>
+              <a:t>GOOD GAME GUILD</a:t>
+            </a:r>
+          </a:p>
+        </p:txBody>
+      </p:sp>
+      <p:sp>
+        <p:nvSpPr>
+          <p:cNvPr id="8" name="TextBox 7"/>
+          <p:cNvSpPr txBox="1"/>
+          <p:nvPr/>
+        </p:nvSpPr>
+        <p:spPr>
+          <a:xfrm>
+            <a:off x="10241280" y="6419088"/>
+            <a:ext cx="1463040" cy="320040"/>
+          </a:xfrm>
+          <a:prstGeom prst="rect">
+            <a:avLst/>
+          </a:prstGeom>
+          <a:noFill/>
+        </p:spPr>
+        <p:txBody>
+          <a:bodyPr wrap="square" anchor="t">
+            <a:spAutoFit/>
+          </a:bodyPr>
+          <a:lstStyle/>
+          <a:p>
+            <a:pPr algn="r">
+              <a:spcBef>
+                <a:spcPts val="0"/>
+              </a:spcBef>
+              <a:spcAft>
+                <a:spcPts val="600"/>
+              </a:spcAft>
+            </a:pPr>
+            <a:r>
+              <a:rPr sz="900" b="1" i="0">
+                <a:solidFill>
+                  <a:srgbClr val="F7BD48"/>
+                </a:solidFill>
+                <a:latin typeface="JetBrains Mono"/>
+              </a:rPr>
+              <a:t>SOROBAN</a:t>
+            </a:r>
+            <a:r>
+              <a:rPr sz="900" b="0" i="0">
+                <a:solidFill>
+                  <a:srgbClr val="D3C4AF"/>
+                </a:solidFill>
+                <a:latin typeface="JetBrains Mono"/>
+              </a:rPr>
+              <a:t>  ·  09</a:t>
             </a:r>
           </a:p>
         </p:txBody>
